--- a/docs/content/05-teaching-resources/slides/digital-support/07-digital-solutions-and-training-users.pptx
+++ b/docs/content/05-teaching-resources/slides/digital-support/07-digital-solutions-and-training-users.pptx
@@ -14,6 +14,10 @@
     <p:sldId id="262" r:id="rId14"/>
     <p:sldId id="263" r:id="rId15"/>
     <p:sldId id="264" r:id="rId16"/>
+    <p:sldId id="265" r:id="rId17"/>
+    <p:sldId id="266" r:id="rId18"/>
+    <p:sldId id="267" r:id="rId19"/>
+    <p:sldId id="268" r:id="rId20"/>
   </p:sldIdLst>
   <p:sldSz cx="12191695" cy="6858000" type="screen4x3"/>
   <p:notesSz cx="6858000" cy="9144000"/>
@@ -510,7 +514,22 @@
           <a:lstStyle/>
           <a:p>
             <a:r>
-              <a:t>Give students a few minutes to answer on mini whiteboards or paper, then reveal the answers on the next slide.</a:t>
+              <a:t>Answers:</a:t>
+            </a:r>
+          </a:p>
+          <a:p>
+            <a:r>
+              <a:t>1. The user's requirement.</a:t>
+            </a:r>
+          </a:p>
+          <a:p>
+            <a:r>
+              <a:t>2. Users care about what it does for them.</a:t>
+            </a:r>
+          </a:p>
+          <a:p>
+            <a:r>
+              <a:t>3. Avoided or explained.</a:t>
             </a:r>
           </a:p>
         </p:txBody>
@@ -580,7 +599,22 @@
           <a:lstStyle/>
           <a:p>
             <a:r>
-              <a:t>Talk through any answers the class found difficult.</a:t>
+              <a:t>Answers:</a:t>
+            </a:r>
+          </a:p>
+          <a:p>
+            <a:r>
+              <a:t>1. Safe practice where mistakes don't affect live systems.</a:t>
+            </a:r>
+          </a:p>
+          <a:p>
+            <a:r>
+              <a:t>2. A short quick-reference guide.</a:t>
+            </a:r>
+          </a:p>
+          <a:p>
+            <a:r>
+              <a:t>3. Many people can watch it whenever they need it.</a:t>
             </a:r>
           </a:p>
         </p:txBody>
@@ -606,6 +640,146 @@
 </file>
 
 <file path=ppt/notesSlides/notesSlide3.xml><?xml version="1.0" encoding="utf-8"?>
+<p:notes xmlns:a="http://schemas.openxmlformats.org/drawingml/2006/main" xmlns:p="http://schemas.openxmlformats.org/presentationml/2006/main" xmlns:r="http://schemas.openxmlformats.org/officeDocument/2006/relationships">
+  <p:cSld>
+    <p:spTree>
+      <p:nvGrpSpPr>
+        <p:cNvPr id="1" name=""/>
+        <p:cNvGrpSpPr/>
+        <p:nvPr/>
+      </p:nvGrpSpPr>
+      <p:grpSpPr>
+        <a:xfrm>
+          <a:off x="0" y="0"/>
+          <a:ext cx="0" cy="0"/>
+          <a:chOff x="0" y="0"/>
+          <a:chExt cx="0" cy="0"/>
+        </a:xfrm>
+      </p:grpSpPr>
+      <p:sp>
+        <p:nvSpPr>
+          <p:cNvPr id="2" name="Slide Image Placeholder 1"/>
+          <p:cNvSpPr>
+            <a:spLocks noGrp="1"/>
+          </p:cNvSpPr>
+          <p:nvPr>
+            <p:ph type="sldImg" idx="2"/>
+          </p:nvPr>
+        </p:nvSpPr>
+        <p:spPr/>
+      </p:sp>
+      <p:sp>
+        <p:nvSpPr>
+          <p:cNvPr id="3" name="Notes Placeholder 2"/>
+          <p:cNvSpPr>
+            <a:spLocks noGrp="1"/>
+          </p:cNvSpPr>
+          <p:nvPr>
+            <p:ph type="body" idx="3" sz="quarter"/>
+          </p:nvPr>
+        </p:nvSpPr>
+        <p:spPr/>
+        <p:txBody>
+          <a:bodyPr/>
+          <a:lstStyle/>
+          <a:p>
+            <a:r>
+              <a:t>Give students a few minutes to answer on mini whiteboards or paper, then reveal the answers on the next slide.</a:t>
+            </a:r>
+          </a:p>
+        </p:txBody>
+      </p:sp>
+      <p:sp>
+        <p:nvSpPr>
+          <p:cNvPr id="4" name="Slide Number Placeholder 3"/>
+          <p:cNvSpPr>
+            <a:spLocks noGrp="1"/>
+          </p:cNvSpPr>
+          <p:nvPr>
+            <p:ph type="sldNum" idx="5" sz="quarter"/>
+          </p:nvPr>
+        </p:nvSpPr>
+        <p:spPr/>
+      </p:sp>
+    </p:spTree>
+  </p:cSld>
+  <p:clrMapOvr>
+    <a:masterClrMapping/>
+  </p:clrMapOvr>
+</p:notes>
+</file>
+
+<file path=ppt/notesSlides/notesSlide4.xml><?xml version="1.0" encoding="utf-8"?>
+<p:notes xmlns:a="http://schemas.openxmlformats.org/drawingml/2006/main" xmlns:p="http://schemas.openxmlformats.org/presentationml/2006/main" xmlns:r="http://schemas.openxmlformats.org/officeDocument/2006/relationships">
+  <p:cSld>
+    <p:spTree>
+      <p:nvGrpSpPr>
+        <p:cNvPr id="1" name=""/>
+        <p:cNvGrpSpPr/>
+        <p:nvPr/>
+      </p:nvGrpSpPr>
+      <p:grpSpPr>
+        <a:xfrm>
+          <a:off x="0" y="0"/>
+          <a:ext cx="0" cy="0"/>
+          <a:chOff x="0" y="0"/>
+          <a:chExt cx="0" cy="0"/>
+        </a:xfrm>
+      </p:grpSpPr>
+      <p:sp>
+        <p:nvSpPr>
+          <p:cNvPr id="2" name="Slide Image Placeholder 1"/>
+          <p:cNvSpPr>
+            <a:spLocks noGrp="1"/>
+          </p:cNvSpPr>
+          <p:nvPr>
+            <p:ph type="sldImg" idx="2"/>
+          </p:nvPr>
+        </p:nvSpPr>
+        <p:spPr/>
+      </p:sp>
+      <p:sp>
+        <p:nvSpPr>
+          <p:cNvPr id="3" name="Notes Placeholder 2"/>
+          <p:cNvSpPr>
+            <a:spLocks noGrp="1"/>
+          </p:cNvSpPr>
+          <p:nvPr>
+            <p:ph type="body" idx="3" sz="quarter"/>
+          </p:nvPr>
+        </p:nvSpPr>
+        <p:spPr/>
+        <p:txBody>
+          <a:bodyPr/>
+          <a:lstStyle/>
+          <a:p>
+            <a:r>
+              <a:t>Talk through any answers the class found difficult.</a:t>
+            </a:r>
+          </a:p>
+        </p:txBody>
+      </p:sp>
+      <p:sp>
+        <p:nvSpPr>
+          <p:cNvPr id="4" name="Slide Number Placeholder 3"/>
+          <p:cNvSpPr>
+            <a:spLocks noGrp="1"/>
+          </p:cNvSpPr>
+          <p:nvPr>
+            <p:ph type="sldNum" idx="5" sz="quarter"/>
+          </p:nvPr>
+        </p:nvSpPr>
+        <p:spPr/>
+      </p:sp>
+    </p:spTree>
+  </p:cSld>
+  <p:clrMapOvr>
+    <a:masterClrMapping/>
+  </p:clrMapOvr>
+</p:notes>
+</file>
+
+<file path=ppt/notesSlides/notesSlide5.xml><?xml version="1.0" encoding="utf-8"?>
 <p:notes xmlns:a="http://schemas.openxmlformats.org/drawingml/2006/main" xmlns:p="http://schemas.openxmlformats.org/presentationml/2006/main" xmlns:r="http://schemas.openxmlformats.org/officeDocument/2006/relationships">
   <p:cSld>
     <p:spTree>
@@ -3963,6 +4137,2355 @@
                 <a:latin typeface="Calibri"/>
               </a:rPr>
               <a:t>Unofficial teaching resource. Check the official Pearson specification for assessment detail.</a:t>
+            </a:r>
+          </a:p>
+        </p:txBody>
+      </p:sp>
+    </p:spTree>
+  </p:cSld>
+  <p:clrMapOvr>
+    <a:masterClrMapping/>
+  </p:clrMapOvr>
+</p:sld>
+</file>
+
+<file path=ppt/slides/slide10.xml><?xml version="1.0" encoding="utf-8"?>
+<p:sld xmlns:a="http://schemas.openxmlformats.org/drawingml/2006/main" xmlns:p="http://schemas.openxmlformats.org/presentationml/2006/main" xmlns:r="http://schemas.openxmlformats.org/officeDocument/2006/relationships">
+  <p:cSld>
+    <p:bg>
+      <p:bgPr>
+        <a:solidFill>
+          <a:srgbClr val="FFFFFF"/>
+        </a:solidFill>
+        <a:effectLst/>
+      </p:bgPr>
+    </p:bg>
+    <p:spTree>
+      <p:nvGrpSpPr>
+        <p:cNvPr id="1" name=""/>
+        <p:cNvGrpSpPr/>
+        <p:nvPr/>
+      </p:nvGrpSpPr>
+      <p:grpSpPr/>
+      <p:sp>
+        <p:nvSpPr>
+          <p:cNvPr id="2" name="TextBox 1"/>
+          <p:cNvSpPr txBox="1"/>
+          <p:nvPr/>
+        </p:nvSpPr>
+        <p:spPr>
+          <a:xfrm>
+            <a:off x="548640" y="320040"/>
+            <a:ext cx="11094415" cy="274320"/>
+          </a:xfrm>
+          <a:prstGeom prst="rect">
+            <a:avLst/>
+          </a:prstGeom>
+          <a:noFill/>
+        </p:spPr>
+        <p:txBody>
+          <a:bodyPr wrap="square" anchor="t" lIns="0" rIns="0" tIns="0" bIns="0"/>
+          <a:lstStyle/>
+          <a:p>
+            <a:pPr algn="l"/>
+            <a:r>
+              <a:rPr sz="1100" b="1" i="0">
+                <a:solidFill>
+                  <a:srgbClr val="54595D"/>
+                </a:solidFill>
+                <a:latin typeface="Calibri"/>
+              </a:rPr>
+              <a:t>DIGITAL SUPPORT  ·  Digital Support Content Area 2</a:t>
+            </a:r>
+          </a:p>
+        </p:txBody>
+      </p:sp>
+      <p:sp>
+        <p:nvSpPr>
+          <p:cNvPr id="3" name="TextBox 2"/>
+          <p:cNvSpPr txBox="1"/>
+          <p:nvPr/>
+        </p:nvSpPr>
+        <p:spPr>
+          <a:xfrm>
+            <a:off x="548640" y="566928"/>
+            <a:ext cx="11094415" cy="822960"/>
+          </a:xfrm>
+          <a:prstGeom prst="rect">
+            <a:avLst/>
+          </a:prstGeom>
+          <a:noFill/>
+        </p:spPr>
+        <p:txBody>
+          <a:bodyPr wrap="square" anchor="ctr" lIns="0" rIns="0" tIns="0" bIns="0"/>
+          <a:lstStyle/>
+          <a:p>
+            <a:pPr algn="l"/>
+            <a:r>
+              <a:rPr sz="3200" b="1" i="0">
+                <a:solidFill>
+                  <a:srgbClr val="03306E"/>
+                </a:solidFill>
+                <a:latin typeface="Cambria"/>
+              </a:rPr>
+              <a:t>Check your understanding</a:t>
+            </a:r>
+          </a:p>
+        </p:txBody>
+      </p:sp>
+      <p:sp>
+        <p:nvSpPr>
+          <p:cNvPr id="4" name="TextBox 3"/>
+          <p:cNvSpPr txBox="1"/>
+          <p:nvPr/>
+        </p:nvSpPr>
+        <p:spPr>
+          <a:xfrm>
+            <a:off x="548640" y="6446520"/>
+            <a:ext cx="8229600" cy="274320"/>
+          </a:xfrm>
+          <a:prstGeom prst="rect">
+            <a:avLst/>
+          </a:prstGeom>
+          <a:noFill/>
+        </p:spPr>
+        <p:txBody>
+          <a:bodyPr wrap="square" anchor="t" lIns="0" rIns="0" tIns="0" bIns="0"/>
+          <a:lstStyle/>
+          <a:p>
+            <a:pPr algn="l"/>
+            <a:r>
+              <a:rPr sz="1000" b="0" i="0">
+                <a:solidFill>
+                  <a:srgbClr val="54595D"/>
+                </a:solidFill>
+                <a:latin typeface="Calibri"/>
+              </a:rPr>
+              <a:t>Digital Support and Security T Level  ·  Digital Solutions and Training Users</a:t>
+            </a:r>
+          </a:p>
+        </p:txBody>
+      </p:sp>
+      <p:sp>
+        <p:nvSpPr>
+          <p:cNvPr id="5" name="TextBox 4"/>
+          <p:cNvSpPr txBox="1"/>
+          <p:nvPr/>
+        </p:nvSpPr>
+        <p:spPr>
+          <a:xfrm>
+            <a:off x="10728655" y="6446520"/>
+            <a:ext cx="914400" cy="274320"/>
+          </a:xfrm>
+          <a:prstGeom prst="rect">
+            <a:avLst/>
+          </a:prstGeom>
+          <a:noFill/>
+        </p:spPr>
+        <p:txBody>
+          <a:bodyPr wrap="square" anchor="t" lIns="0" rIns="0" tIns="0" bIns="0"/>
+          <a:lstStyle/>
+          <a:p>
+            <a:pPr algn="r"/>
+            <a:r>
+              <a:rPr sz="1000" b="0" i="0">
+                <a:solidFill>
+                  <a:srgbClr val="54595D"/>
+                </a:solidFill>
+                <a:latin typeface="Calibri"/>
+              </a:rPr>
+              <a:t>10</a:t>
+            </a:r>
+          </a:p>
+        </p:txBody>
+      </p:sp>
+      <p:sp>
+        <p:nvSpPr>
+          <p:cNvPr id="6" name="Oval 5"/>
+          <p:cNvSpPr/>
+          <p:nvPr/>
+        </p:nvSpPr>
+        <p:spPr>
+          <a:xfrm>
+            <a:off x="548640" y="1618488"/>
+            <a:ext cx="411480" cy="411480"/>
+          </a:xfrm>
+          <a:prstGeom prst="ellipse">
+            <a:avLst/>
+          </a:prstGeom>
+          <a:solidFill>
+            <a:srgbClr val="4EA1FF"/>
+          </a:solidFill>
+          <a:ln>
+            <a:noFill/>
+          </a:ln>
+          <a:effectLst/>
+        </p:spPr>
+        <p:style>
+          <a:lnRef idx="1">
+            <a:schemeClr val="accent1"/>
+          </a:lnRef>
+          <a:fillRef idx="3">
+            <a:schemeClr val="accent1"/>
+          </a:fillRef>
+          <a:effectRef idx="2">
+            <a:schemeClr val="accent1"/>
+          </a:effectRef>
+          <a:fontRef idx="minor">
+            <a:schemeClr val="lt1"/>
+          </a:fontRef>
+        </p:style>
+        <p:txBody>
+          <a:bodyPr rtlCol="0" anchor="ctr" lIns="0" rIns="0" tIns="0" bIns="0"/>
+          <a:lstStyle/>
+          <a:p>
+            <a:pPr algn="ctr"/>
+            <a:r>
+              <a:rPr sz="1400" b="1">
+                <a:solidFill>
+                  <a:srgbClr val="202122"/>
+                </a:solidFill>
+                <a:latin typeface="Calibri"/>
+              </a:rPr>
+              <a:t>1</a:t>
+            </a:r>
+          </a:p>
+        </p:txBody>
+      </p:sp>
+      <p:sp>
+        <p:nvSpPr>
+          <p:cNvPr id="7" name="TextBox 6"/>
+          <p:cNvSpPr txBox="1"/>
+          <p:nvPr/>
+        </p:nvSpPr>
+        <p:spPr>
+          <a:xfrm>
+            <a:off x="1234440" y="1600200"/>
+            <a:ext cx="10408615" cy="1030986"/>
+          </a:xfrm>
+          <a:prstGeom prst="rect">
+            <a:avLst/>
+          </a:prstGeom>
+          <a:noFill/>
+        </p:spPr>
+        <p:txBody>
+          <a:bodyPr wrap="square" anchor="t" lIns="0" rIns="0" tIns="0" bIns="0"/>
+          <a:lstStyle/>
+          <a:p>
+            <a:pPr algn="l"/>
+            <a:r>
+              <a:rPr sz="2200" b="0" i="0">
+                <a:solidFill>
+                  <a:srgbClr val="202122"/>
+                </a:solidFill>
+                <a:latin typeface="Calibri"/>
+              </a:rPr>
+              <a:t>Give a digital technology used in HR.</a:t>
+            </a:r>
+          </a:p>
+        </p:txBody>
+      </p:sp>
+      <p:sp>
+        <p:nvSpPr>
+          <p:cNvPr id="8" name="Oval 7"/>
+          <p:cNvSpPr/>
+          <p:nvPr/>
+        </p:nvSpPr>
+        <p:spPr>
+          <a:xfrm>
+            <a:off x="548640" y="2814066"/>
+            <a:ext cx="411480" cy="411480"/>
+          </a:xfrm>
+          <a:prstGeom prst="ellipse">
+            <a:avLst/>
+          </a:prstGeom>
+          <a:solidFill>
+            <a:srgbClr val="4EA1FF"/>
+          </a:solidFill>
+          <a:ln>
+            <a:noFill/>
+          </a:ln>
+          <a:effectLst/>
+        </p:spPr>
+        <p:style>
+          <a:lnRef idx="1">
+            <a:schemeClr val="accent1"/>
+          </a:lnRef>
+          <a:fillRef idx="3">
+            <a:schemeClr val="accent1"/>
+          </a:fillRef>
+          <a:effectRef idx="2">
+            <a:schemeClr val="accent1"/>
+          </a:effectRef>
+          <a:fontRef idx="minor">
+            <a:schemeClr val="lt1"/>
+          </a:fontRef>
+        </p:style>
+        <p:txBody>
+          <a:bodyPr rtlCol="0" anchor="ctr" lIns="0" rIns="0" tIns="0" bIns="0"/>
+          <a:lstStyle/>
+          <a:p>
+            <a:pPr algn="ctr"/>
+            <a:r>
+              <a:rPr sz="1400" b="1">
+                <a:solidFill>
+                  <a:srgbClr val="202122"/>
+                </a:solidFill>
+                <a:latin typeface="Calibri"/>
+              </a:rPr>
+              <a:t>2</a:t>
+            </a:r>
+          </a:p>
+        </p:txBody>
+      </p:sp>
+      <p:sp>
+        <p:nvSpPr>
+          <p:cNvPr id="9" name="TextBox 8"/>
+          <p:cNvSpPr txBox="1"/>
+          <p:nvPr/>
+        </p:nvSpPr>
+        <p:spPr>
+          <a:xfrm>
+            <a:off x="1234440" y="2795778"/>
+            <a:ext cx="10408615" cy="1030986"/>
+          </a:xfrm>
+          <a:prstGeom prst="rect">
+            <a:avLst/>
+          </a:prstGeom>
+          <a:noFill/>
+        </p:spPr>
+        <p:txBody>
+          <a:bodyPr wrap="square" anchor="t" lIns="0" rIns="0" tIns="0" bIns="0"/>
+          <a:lstStyle/>
+          <a:p>
+            <a:pPr algn="l"/>
+            <a:r>
+              <a:rPr sz="2200" b="0" i="0">
+                <a:solidFill>
+                  <a:srgbClr val="202122"/>
+                </a:solidFill>
+                <a:latin typeface="Calibri"/>
+              </a:rPr>
+              <a:t>What is a crib sheet?</a:t>
+            </a:r>
+          </a:p>
+        </p:txBody>
+      </p:sp>
+      <p:sp>
+        <p:nvSpPr>
+          <p:cNvPr id="10" name="Oval 9"/>
+          <p:cNvSpPr/>
+          <p:nvPr/>
+        </p:nvSpPr>
+        <p:spPr>
+          <a:xfrm>
+            <a:off x="548640" y="4009644"/>
+            <a:ext cx="411480" cy="411480"/>
+          </a:xfrm>
+          <a:prstGeom prst="ellipse">
+            <a:avLst/>
+          </a:prstGeom>
+          <a:solidFill>
+            <a:srgbClr val="4EA1FF"/>
+          </a:solidFill>
+          <a:ln>
+            <a:noFill/>
+          </a:ln>
+          <a:effectLst/>
+        </p:spPr>
+        <p:style>
+          <a:lnRef idx="1">
+            <a:schemeClr val="accent1"/>
+          </a:lnRef>
+          <a:fillRef idx="3">
+            <a:schemeClr val="accent1"/>
+          </a:fillRef>
+          <a:effectRef idx="2">
+            <a:schemeClr val="accent1"/>
+          </a:effectRef>
+          <a:fontRef idx="minor">
+            <a:schemeClr val="lt1"/>
+          </a:fontRef>
+        </p:style>
+        <p:txBody>
+          <a:bodyPr rtlCol="0" anchor="ctr" lIns="0" rIns="0" tIns="0" bIns="0"/>
+          <a:lstStyle/>
+          <a:p>
+            <a:pPr algn="ctr"/>
+            <a:r>
+              <a:rPr sz="1400" b="1">
+                <a:solidFill>
+                  <a:srgbClr val="202122"/>
+                </a:solidFill>
+                <a:latin typeface="Calibri"/>
+              </a:rPr>
+              <a:t>3</a:t>
+            </a:r>
+          </a:p>
+        </p:txBody>
+      </p:sp>
+      <p:sp>
+        <p:nvSpPr>
+          <p:cNvPr id="11" name="TextBox 10"/>
+          <p:cNvSpPr txBox="1"/>
+          <p:nvPr/>
+        </p:nvSpPr>
+        <p:spPr>
+          <a:xfrm>
+            <a:off x="1234440" y="3991356"/>
+            <a:ext cx="10408615" cy="1030986"/>
+          </a:xfrm>
+          <a:prstGeom prst="rect">
+            <a:avLst/>
+          </a:prstGeom>
+          <a:noFill/>
+        </p:spPr>
+        <p:txBody>
+          <a:bodyPr wrap="square" anchor="t" lIns="0" rIns="0" tIns="0" bIns="0"/>
+          <a:lstStyle/>
+          <a:p>
+            <a:pPr algn="l"/>
+            <a:r>
+              <a:rPr sz="2200" b="0" i="0">
+                <a:solidFill>
+                  <a:srgbClr val="202122"/>
+                </a:solidFill>
+                <a:latin typeface="Calibri"/>
+              </a:rPr>
+              <a:t>Why use a sandboxed environment for training?</a:t>
+            </a:r>
+          </a:p>
+        </p:txBody>
+      </p:sp>
+      <p:sp>
+        <p:nvSpPr>
+          <p:cNvPr id="12" name="Oval 11"/>
+          <p:cNvSpPr/>
+          <p:nvPr/>
+        </p:nvSpPr>
+        <p:spPr>
+          <a:xfrm>
+            <a:off x="548640" y="5205221"/>
+            <a:ext cx="411480" cy="411480"/>
+          </a:xfrm>
+          <a:prstGeom prst="ellipse">
+            <a:avLst/>
+          </a:prstGeom>
+          <a:solidFill>
+            <a:srgbClr val="4EA1FF"/>
+          </a:solidFill>
+          <a:ln>
+            <a:noFill/>
+          </a:ln>
+          <a:effectLst/>
+        </p:spPr>
+        <p:style>
+          <a:lnRef idx="1">
+            <a:schemeClr val="accent1"/>
+          </a:lnRef>
+          <a:fillRef idx="3">
+            <a:schemeClr val="accent1"/>
+          </a:fillRef>
+          <a:effectRef idx="2">
+            <a:schemeClr val="accent1"/>
+          </a:effectRef>
+          <a:fontRef idx="minor">
+            <a:schemeClr val="lt1"/>
+          </a:fontRef>
+        </p:style>
+        <p:txBody>
+          <a:bodyPr rtlCol="0" anchor="ctr" lIns="0" rIns="0" tIns="0" bIns="0"/>
+          <a:lstStyle/>
+          <a:p>
+            <a:pPr algn="ctr"/>
+            <a:r>
+              <a:rPr sz="1400" b="1">
+                <a:solidFill>
+                  <a:srgbClr val="202122"/>
+                </a:solidFill>
+                <a:latin typeface="Calibri"/>
+              </a:rPr>
+              <a:t>4</a:t>
+            </a:r>
+          </a:p>
+        </p:txBody>
+      </p:sp>
+      <p:sp>
+        <p:nvSpPr>
+          <p:cNvPr id="13" name="TextBox 12"/>
+          <p:cNvSpPr txBox="1"/>
+          <p:nvPr/>
+        </p:nvSpPr>
+        <p:spPr>
+          <a:xfrm>
+            <a:off x="1234440" y="5186933"/>
+            <a:ext cx="10408615" cy="1030986"/>
+          </a:xfrm>
+          <a:prstGeom prst="rect">
+            <a:avLst/>
+          </a:prstGeom>
+          <a:noFill/>
+        </p:spPr>
+        <p:txBody>
+          <a:bodyPr wrap="square" anchor="t" lIns="0" rIns="0" tIns="0" bIns="0"/>
+          <a:lstStyle/>
+          <a:p>
+            <a:pPr algn="l"/>
+            <a:r>
+              <a:rPr sz="2200" b="0" i="0">
+                <a:solidFill>
+                  <a:srgbClr val="202122"/>
+                </a:solidFill>
+                <a:latin typeface="Calibri"/>
+              </a:rPr>
+              <a:t>What should you consider when explaining a solution?</a:t>
+            </a:r>
+          </a:p>
+        </p:txBody>
+      </p:sp>
+    </p:spTree>
+  </p:cSld>
+  <p:clrMapOvr>
+    <a:masterClrMapping/>
+  </p:clrMapOvr>
+</p:sld>
+</file>
+
+<file path=ppt/slides/slide11.xml><?xml version="1.0" encoding="utf-8"?>
+<p:sld xmlns:a="http://schemas.openxmlformats.org/drawingml/2006/main" xmlns:p="http://schemas.openxmlformats.org/presentationml/2006/main" xmlns:r="http://schemas.openxmlformats.org/officeDocument/2006/relationships">
+  <p:cSld>
+    <p:bg>
+      <p:bgPr>
+        <a:solidFill>
+          <a:srgbClr val="FFFFFF"/>
+        </a:solidFill>
+        <a:effectLst/>
+      </p:bgPr>
+    </p:bg>
+    <p:spTree>
+      <p:nvGrpSpPr>
+        <p:cNvPr id="1" name=""/>
+        <p:cNvGrpSpPr/>
+        <p:nvPr/>
+      </p:nvGrpSpPr>
+      <p:grpSpPr/>
+      <p:sp>
+        <p:nvSpPr>
+          <p:cNvPr id="2" name="TextBox 1"/>
+          <p:cNvSpPr txBox="1"/>
+          <p:nvPr/>
+        </p:nvSpPr>
+        <p:spPr>
+          <a:xfrm>
+            <a:off x="548640" y="320040"/>
+            <a:ext cx="11094415" cy="274320"/>
+          </a:xfrm>
+          <a:prstGeom prst="rect">
+            <a:avLst/>
+          </a:prstGeom>
+          <a:noFill/>
+        </p:spPr>
+        <p:txBody>
+          <a:bodyPr wrap="square" anchor="t" lIns="0" rIns="0" tIns="0" bIns="0"/>
+          <a:lstStyle/>
+          <a:p>
+            <a:pPr algn="l"/>
+            <a:r>
+              <a:rPr sz="1100" b="1" i="0">
+                <a:solidFill>
+                  <a:srgbClr val="54595D"/>
+                </a:solidFill>
+                <a:latin typeface="Calibri"/>
+              </a:rPr>
+              <a:t>DIGITAL SUPPORT  ·  Digital Support Content Area 2</a:t>
+            </a:r>
+          </a:p>
+        </p:txBody>
+      </p:sp>
+      <p:sp>
+        <p:nvSpPr>
+          <p:cNvPr id="3" name="TextBox 2"/>
+          <p:cNvSpPr txBox="1"/>
+          <p:nvPr/>
+        </p:nvSpPr>
+        <p:spPr>
+          <a:xfrm>
+            <a:off x="548640" y="566928"/>
+            <a:ext cx="11094415" cy="822960"/>
+          </a:xfrm>
+          <a:prstGeom prst="rect">
+            <a:avLst/>
+          </a:prstGeom>
+          <a:noFill/>
+        </p:spPr>
+        <p:txBody>
+          <a:bodyPr wrap="square" anchor="ctr" lIns="0" rIns="0" tIns="0" bIns="0"/>
+          <a:lstStyle/>
+          <a:p>
+            <a:pPr algn="l"/>
+            <a:r>
+              <a:rPr sz="3200" b="1" i="0">
+                <a:solidFill>
+                  <a:srgbClr val="03306E"/>
+                </a:solidFill>
+                <a:latin typeface="Cambria"/>
+              </a:rPr>
+              <a:t>Answers</a:t>
+            </a:r>
+          </a:p>
+        </p:txBody>
+      </p:sp>
+      <p:sp>
+        <p:nvSpPr>
+          <p:cNvPr id="4" name="TextBox 3"/>
+          <p:cNvSpPr txBox="1"/>
+          <p:nvPr/>
+        </p:nvSpPr>
+        <p:spPr>
+          <a:xfrm>
+            <a:off x="548640" y="6446520"/>
+            <a:ext cx="8229600" cy="274320"/>
+          </a:xfrm>
+          <a:prstGeom prst="rect">
+            <a:avLst/>
+          </a:prstGeom>
+          <a:noFill/>
+        </p:spPr>
+        <p:txBody>
+          <a:bodyPr wrap="square" anchor="t" lIns="0" rIns="0" tIns="0" bIns="0"/>
+          <a:lstStyle/>
+          <a:p>
+            <a:pPr algn="l"/>
+            <a:r>
+              <a:rPr sz="1000" b="0" i="0">
+                <a:solidFill>
+                  <a:srgbClr val="54595D"/>
+                </a:solidFill>
+                <a:latin typeface="Calibri"/>
+              </a:rPr>
+              <a:t>Digital Support and Security T Level  ·  Digital Solutions and Training Users</a:t>
+            </a:r>
+          </a:p>
+        </p:txBody>
+      </p:sp>
+      <p:sp>
+        <p:nvSpPr>
+          <p:cNvPr id="5" name="TextBox 4"/>
+          <p:cNvSpPr txBox="1"/>
+          <p:nvPr/>
+        </p:nvSpPr>
+        <p:spPr>
+          <a:xfrm>
+            <a:off x="10728655" y="6446520"/>
+            <a:ext cx="914400" cy="274320"/>
+          </a:xfrm>
+          <a:prstGeom prst="rect">
+            <a:avLst/>
+          </a:prstGeom>
+          <a:noFill/>
+        </p:spPr>
+        <p:txBody>
+          <a:bodyPr wrap="square" anchor="t" lIns="0" rIns="0" tIns="0" bIns="0"/>
+          <a:lstStyle/>
+          <a:p>
+            <a:pPr algn="r"/>
+            <a:r>
+              <a:rPr sz="1000" b="0" i="0">
+                <a:solidFill>
+                  <a:srgbClr val="54595D"/>
+                </a:solidFill>
+                <a:latin typeface="Calibri"/>
+              </a:rPr>
+              <a:t>11</a:t>
+            </a:r>
+          </a:p>
+        </p:txBody>
+      </p:sp>
+      <p:sp>
+        <p:nvSpPr>
+          <p:cNvPr id="6" name="Oval 5"/>
+          <p:cNvSpPr/>
+          <p:nvPr/>
+        </p:nvSpPr>
+        <p:spPr>
+          <a:xfrm>
+            <a:off x="548640" y="1618488"/>
+            <a:ext cx="411480" cy="411480"/>
+          </a:xfrm>
+          <a:prstGeom prst="ellipse">
+            <a:avLst/>
+          </a:prstGeom>
+          <a:solidFill>
+            <a:srgbClr val="4EA1FF"/>
+          </a:solidFill>
+          <a:ln>
+            <a:noFill/>
+          </a:ln>
+          <a:effectLst/>
+        </p:spPr>
+        <p:style>
+          <a:lnRef idx="1">
+            <a:schemeClr val="accent1"/>
+          </a:lnRef>
+          <a:fillRef idx="3">
+            <a:schemeClr val="accent1"/>
+          </a:fillRef>
+          <a:effectRef idx="2">
+            <a:schemeClr val="accent1"/>
+          </a:effectRef>
+          <a:fontRef idx="minor">
+            <a:schemeClr val="lt1"/>
+          </a:fontRef>
+        </p:style>
+        <p:txBody>
+          <a:bodyPr rtlCol="0" anchor="ctr" lIns="0" rIns="0" tIns="0" bIns="0"/>
+          <a:lstStyle/>
+          <a:p>
+            <a:pPr algn="ctr"/>
+            <a:r>
+              <a:rPr sz="1400" b="1">
+                <a:solidFill>
+                  <a:srgbClr val="202122"/>
+                </a:solidFill>
+                <a:latin typeface="Calibri"/>
+              </a:rPr>
+              <a:t>1</a:t>
+            </a:r>
+          </a:p>
+        </p:txBody>
+      </p:sp>
+      <p:sp>
+        <p:nvSpPr>
+          <p:cNvPr id="7" name="TextBox 6"/>
+          <p:cNvSpPr txBox="1"/>
+          <p:nvPr/>
+        </p:nvSpPr>
+        <p:spPr>
+          <a:xfrm>
+            <a:off x="1234440" y="1600200"/>
+            <a:ext cx="10408615" cy="1030986"/>
+          </a:xfrm>
+          <a:prstGeom prst="rect">
+            <a:avLst/>
+          </a:prstGeom>
+          <a:noFill/>
+        </p:spPr>
+        <p:txBody>
+          <a:bodyPr wrap="square" anchor="t" lIns="0" rIns="0" tIns="0" bIns="0"/>
+          <a:lstStyle/>
+          <a:p>
+            <a:pPr algn="l"/>
+            <a:r>
+              <a:rPr sz="1800" b="0" i="0">
+                <a:solidFill>
+                  <a:srgbClr val="54595D"/>
+                </a:solidFill>
+                <a:latin typeface="Calibri"/>
+              </a:rPr>
+              <a:t>Give a digital technology used in HR.</a:t>
+            </a:r>
+          </a:p>
+          <a:p>
+            <a:r>
+              <a:rPr sz="1800" b="1">
+                <a:solidFill>
+                  <a:srgbClr val="03306E"/>
+                </a:solidFill>
+                <a:latin typeface="Calibri"/>
+              </a:rPr>
+              <a:t>Personnel systems or digital training.</a:t>
+            </a:r>
+          </a:p>
+        </p:txBody>
+      </p:sp>
+      <p:sp>
+        <p:nvSpPr>
+          <p:cNvPr id="8" name="Oval 7"/>
+          <p:cNvSpPr/>
+          <p:nvPr/>
+        </p:nvSpPr>
+        <p:spPr>
+          <a:xfrm>
+            <a:off x="548640" y="2814066"/>
+            <a:ext cx="411480" cy="411480"/>
+          </a:xfrm>
+          <a:prstGeom prst="ellipse">
+            <a:avLst/>
+          </a:prstGeom>
+          <a:solidFill>
+            <a:srgbClr val="4EA1FF"/>
+          </a:solidFill>
+          <a:ln>
+            <a:noFill/>
+          </a:ln>
+          <a:effectLst/>
+        </p:spPr>
+        <p:style>
+          <a:lnRef idx="1">
+            <a:schemeClr val="accent1"/>
+          </a:lnRef>
+          <a:fillRef idx="3">
+            <a:schemeClr val="accent1"/>
+          </a:fillRef>
+          <a:effectRef idx="2">
+            <a:schemeClr val="accent1"/>
+          </a:effectRef>
+          <a:fontRef idx="minor">
+            <a:schemeClr val="lt1"/>
+          </a:fontRef>
+        </p:style>
+        <p:txBody>
+          <a:bodyPr rtlCol="0" anchor="ctr" lIns="0" rIns="0" tIns="0" bIns="0"/>
+          <a:lstStyle/>
+          <a:p>
+            <a:pPr algn="ctr"/>
+            <a:r>
+              <a:rPr sz="1400" b="1">
+                <a:solidFill>
+                  <a:srgbClr val="202122"/>
+                </a:solidFill>
+                <a:latin typeface="Calibri"/>
+              </a:rPr>
+              <a:t>2</a:t>
+            </a:r>
+          </a:p>
+        </p:txBody>
+      </p:sp>
+      <p:sp>
+        <p:nvSpPr>
+          <p:cNvPr id="9" name="TextBox 8"/>
+          <p:cNvSpPr txBox="1"/>
+          <p:nvPr/>
+        </p:nvSpPr>
+        <p:spPr>
+          <a:xfrm>
+            <a:off x="1234440" y="2795778"/>
+            <a:ext cx="10408615" cy="1030986"/>
+          </a:xfrm>
+          <a:prstGeom prst="rect">
+            <a:avLst/>
+          </a:prstGeom>
+          <a:noFill/>
+        </p:spPr>
+        <p:txBody>
+          <a:bodyPr wrap="square" anchor="t" lIns="0" rIns="0" tIns="0" bIns="0"/>
+          <a:lstStyle/>
+          <a:p>
+            <a:pPr algn="l"/>
+            <a:r>
+              <a:rPr sz="1800" b="0" i="0">
+                <a:solidFill>
+                  <a:srgbClr val="54595D"/>
+                </a:solidFill>
+                <a:latin typeface="Calibri"/>
+              </a:rPr>
+              <a:t>What is a crib sheet?</a:t>
+            </a:r>
+          </a:p>
+          <a:p>
+            <a:r>
+              <a:rPr sz="1800" b="1">
+                <a:solidFill>
+                  <a:srgbClr val="03306E"/>
+                </a:solidFill>
+                <a:latin typeface="Calibri"/>
+              </a:rPr>
+              <a:t>A short, quick-reference guide.</a:t>
+            </a:r>
+          </a:p>
+        </p:txBody>
+      </p:sp>
+      <p:sp>
+        <p:nvSpPr>
+          <p:cNvPr id="10" name="Oval 9"/>
+          <p:cNvSpPr/>
+          <p:nvPr/>
+        </p:nvSpPr>
+        <p:spPr>
+          <a:xfrm>
+            <a:off x="548640" y="4009644"/>
+            <a:ext cx="411480" cy="411480"/>
+          </a:xfrm>
+          <a:prstGeom prst="ellipse">
+            <a:avLst/>
+          </a:prstGeom>
+          <a:solidFill>
+            <a:srgbClr val="4EA1FF"/>
+          </a:solidFill>
+          <a:ln>
+            <a:noFill/>
+          </a:ln>
+          <a:effectLst/>
+        </p:spPr>
+        <p:style>
+          <a:lnRef idx="1">
+            <a:schemeClr val="accent1"/>
+          </a:lnRef>
+          <a:fillRef idx="3">
+            <a:schemeClr val="accent1"/>
+          </a:fillRef>
+          <a:effectRef idx="2">
+            <a:schemeClr val="accent1"/>
+          </a:effectRef>
+          <a:fontRef idx="minor">
+            <a:schemeClr val="lt1"/>
+          </a:fontRef>
+        </p:style>
+        <p:txBody>
+          <a:bodyPr rtlCol="0" anchor="ctr" lIns="0" rIns="0" tIns="0" bIns="0"/>
+          <a:lstStyle/>
+          <a:p>
+            <a:pPr algn="ctr"/>
+            <a:r>
+              <a:rPr sz="1400" b="1">
+                <a:solidFill>
+                  <a:srgbClr val="202122"/>
+                </a:solidFill>
+                <a:latin typeface="Calibri"/>
+              </a:rPr>
+              <a:t>3</a:t>
+            </a:r>
+          </a:p>
+        </p:txBody>
+      </p:sp>
+      <p:sp>
+        <p:nvSpPr>
+          <p:cNvPr id="11" name="TextBox 10"/>
+          <p:cNvSpPr txBox="1"/>
+          <p:nvPr/>
+        </p:nvSpPr>
+        <p:spPr>
+          <a:xfrm>
+            <a:off x="1234440" y="3991356"/>
+            <a:ext cx="10408615" cy="1030986"/>
+          </a:xfrm>
+          <a:prstGeom prst="rect">
+            <a:avLst/>
+          </a:prstGeom>
+          <a:noFill/>
+        </p:spPr>
+        <p:txBody>
+          <a:bodyPr wrap="square" anchor="t" lIns="0" rIns="0" tIns="0" bIns="0"/>
+          <a:lstStyle/>
+          <a:p>
+            <a:pPr algn="l"/>
+            <a:r>
+              <a:rPr sz="1800" b="0" i="0">
+                <a:solidFill>
+                  <a:srgbClr val="54595D"/>
+                </a:solidFill>
+                <a:latin typeface="Calibri"/>
+              </a:rPr>
+              <a:t>Why use a sandboxed environment for training?</a:t>
+            </a:r>
+          </a:p>
+          <a:p>
+            <a:r>
+              <a:rPr sz="1800" b="1">
+                <a:solidFill>
+                  <a:srgbClr val="03306E"/>
+                </a:solidFill>
+                <a:latin typeface="Calibri"/>
+              </a:rPr>
+              <a:t>Users can practise without affecting live systems.</a:t>
+            </a:r>
+          </a:p>
+        </p:txBody>
+      </p:sp>
+      <p:sp>
+        <p:nvSpPr>
+          <p:cNvPr id="12" name="Oval 11"/>
+          <p:cNvSpPr/>
+          <p:nvPr/>
+        </p:nvSpPr>
+        <p:spPr>
+          <a:xfrm>
+            <a:off x="548640" y="5205221"/>
+            <a:ext cx="411480" cy="411480"/>
+          </a:xfrm>
+          <a:prstGeom prst="ellipse">
+            <a:avLst/>
+          </a:prstGeom>
+          <a:solidFill>
+            <a:srgbClr val="4EA1FF"/>
+          </a:solidFill>
+          <a:ln>
+            <a:noFill/>
+          </a:ln>
+          <a:effectLst/>
+        </p:spPr>
+        <p:style>
+          <a:lnRef idx="1">
+            <a:schemeClr val="accent1"/>
+          </a:lnRef>
+          <a:fillRef idx="3">
+            <a:schemeClr val="accent1"/>
+          </a:fillRef>
+          <a:effectRef idx="2">
+            <a:schemeClr val="accent1"/>
+          </a:effectRef>
+          <a:fontRef idx="minor">
+            <a:schemeClr val="lt1"/>
+          </a:fontRef>
+        </p:style>
+        <p:txBody>
+          <a:bodyPr rtlCol="0" anchor="ctr" lIns="0" rIns="0" tIns="0" bIns="0"/>
+          <a:lstStyle/>
+          <a:p>
+            <a:pPr algn="ctr"/>
+            <a:r>
+              <a:rPr sz="1400" b="1">
+                <a:solidFill>
+                  <a:srgbClr val="202122"/>
+                </a:solidFill>
+                <a:latin typeface="Calibri"/>
+              </a:rPr>
+              <a:t>4</a:t>
+            </a:r>
+          </a:p>
+        </p:txBody>
+      </p:sp>
+      <p:sp>
+        <p:nvSpPr>
+          <p:cNvPr id="13" name="TextBox 12"/>
+          <p:cNvSpPr txBox="1"/>
+          <p:nvPr/>
+        </p:nvSpPr>
+        <p:spPr>
+          <a:xfrm>
+            <a:off x="1234440" y="5186933"/>
+            <a:ext cx="10408615" cy="1030986"/>
+          </a:xfrm>
+          <a:prstGeom prst="rect">
+            <a:avLst/>
+          </a:prstGeom>
+          <a:noFill/>
+        </p:spPr>
+        <p:txBody>
+          <a:bodyPr wrap="square" anchor="t" lIns="0" rIns="0" tIns="0" bIns="0"/>
+          <a:lstStyle/>
+          <a:p>
+            <a:pPr algn="l"/>
+            <a:r>
+              <a:rPr sz="1800" b="0" i="0">
+                <a:solidFill>
+                  <a:srgbClr val="54595D"/>
+                </a:solidFill>
+                <a:latin typeface="Calibri"/>
+              </a:rPr>
+              <a:t>What should you consider when explaining a solution?</a:t>
+            </a:r>
+          </a:p>
+          <a:p>
+            <a:r>
+              <a:rPr sz="1800" b="1">
+                <a:solidFill>
+                  <a:srgbClr val="03306E"/>
+                </a:solidFill>
+                <a:latin typeface="Calibri"/>
+              </a:rPr>
+              <a:t>The audience, and using clear, concise technical terms.</a:t>
+            </a:r>
+          </a:p>
+        </p:txBody>
+      </p:sp>
+    </p:spTree>
+  </p:cSld>
+  <p:clrMapOvr>
+    <a:masterClrMapping/>
+  </p:clrMapOvr>
+</p:sld>
+</file>
+
+<file path=ppt/slides/slide12.xml><?xml version="1.0" encoding="utf-8"?>
+<p:sld xmlns:a="http://schemas.openxmlformats.org/drawingml/2006/main" xmlns:p="http://schemas.openxmlformats.org/presentationml/2006/main" xmlns:r="http://schemas.openxmlformats.org/officeDocument/2006/relationships">
+  <p:cSld>
+    <p:bg>
+      <p:bgPr>
+        <a:solidFill>
+          <a:srgbClr val="FFFFFF"/>
+        </a:solidFill>
+        <a:effectLst/>
+      </p:bgPr>
+    </p:bg>
+    <p:spTree>
+      <p:nvGrpSpPr>
+        <p:cNvPr id="1" name=""/>
+        <p:cNvGrpSpPr/>
+        <p:nvPr/>
+      </p:nvGrpSpPr>
+      <p:grpSpPr/>
+      <p:sp>
+        <p:nvSpPr>
+          <p:cNvPr id="2" name="TextBox 1"/>
+          <p:cNvSpPr txBox="1"/>
+          <p:nvPr/>
+        </p:nvSpPr>
+        <p:spPr>
+          <a:xfrm>
+            <a:off x="548640" y="320040"/>
+            <a:ext cx="11094415" cy="274320"/>
+          </a:xfrm>
+          <a:prstGeom prst="rect">
+            <a:avLst/>
+          </a:prstGeom>
+          <a:noFill/>
+        </p:spPr>
+        <p:txBody>
+          <a:bodyPr wrap="square" anchor="t" lIns="0" rIns="0" tIns="0" bIns="0"/>
+          <a:lstStyle/>
+          <a:p>
+            <a:pPr algn="l"/>
+            <a:r>
+              <a:rPr sz="1100" b="1" i="0">
+                <a:solidFill>
+                  <a:srgbClr val="54595D"/>
+                </a:solidFill>
+                <a:latin typeface="Calibri"/>
+              </a:rPr>
+              <a:t>DIGITAL SUPPORT  ·  Digital Support Content Area 2</a:t>
+            </a:r>
+          </a:p>
+        </p:txBody>
+      </p:sp>
+      <p:sp>
+        <p:nvSpPr>
+          <p:cNvPr id="3" name="TextBox 2"/>
+          <p:cNvSpPr txBox="1"/>
+          <p:nvPr/>
+        </p:nvSpPr>
+        <p:spPr>
+          <a:xfrm>
+            <a:off x="548640" y="566928"/>
+            <a:ext cx="11094415" cy="822960"/>
+          </a:xfrm>
+          <a:prstGeom prst="rect">
+            <a:avLst/>
+          </a:prstGeom>
+          <a:noFill/>
+        </p:spPr>
+        <p:txBody>
+          <a:bodyPr wrap="square" anchor="ctr" lIns="0" rIns="0" tIns="0" bIns="0"/>
+          <a:lstStyle/>
+          <a:p>
+            <a:pPr algn="l"/>
+            <a:r>
+              <a:rPr sz="3200" b="1" i="0">
+                <a:solidFill>
+                  <a:srgbClr val="03306E"/>
+                </a:solidFill>
+                <a:latin typeface="Cambria"/>
+              </a:rPr>
+              <a:t>Activity: Make a crib sheet and screencast</a:t>
+            </a:r>
+          </a:p>
+        </p:txBody>
+      </p:sp>
+      <p:sp>
+        <p:nvSpPr>
+          <p:cNvPr id="4" name="TextBox 3"/>
+          <p:cNvSpPr txBox="1"/>
+          <p:nvPr/>
+        </p:nvSpPr>
+        <p:spPr>
+          <a:xfrm>
+            <a:off x="548640" y="6446520"/>
+            <a:ext cx="8229600" cy="274320"/>
+          </a:xfrm>
+          <a:prstGeom prst="rect">
+            <a:avLst/>
+          </a:prstGeom>
+          <a:noFill/>
+        </p:spPr>
+        <p:txBody>
+          <a:bodyPr wrap="square" anchor="t" lIns="0" rIns="0" tIns="0" bIns="0"/>
+          <a:lstStyle/>
+          <a:p>
+            <a:pPr algn="l"/>
+            <a:r>
+              <a:rPr sz="1000" b="0" i="0">
+                <a:solidFill>
+                  <a:srgbClr val="54595D"/>
+                </a:solidFill>
+                <a:latin typeface="Calibri"/>
+              </a:rPr>
+              <a:t>Digital Support and Security T Level  ·  Digital Solutions and Training Users</a:t>
+            </a:r>
+          </a:p>
+        </p:txBody>
+      </p:sp>
+      <p:sp>
+        <p:nvSpPr>
+          <p:cNvPr id="5" name="TextBox 4"/>
+          <p:cNvSpPr txBox="1"/>
+          <p:nvPr/>
+        </p:nvSpPr>
+        <p:spPr>
+          <a:xfrm>
+            <a:off x="10728655" y="6446520"/>
+            <a:ext cx="914400" cy="274320"/>
+          </a:xfrm>
+          <a:prstGeom prst="rect">
+            <a:avLst/>
+          </a:prstGeom>
+          <a:noFill/>
+        </p:spPr>
+        <p:txBody>
+          <a:bodyPr wrap="square" anchor="t" lIns="0" rIns="0" tIns="0" bIns="0"/>
+          <a:lstStyle/>
+          <a:p>
+            <a:pPr algn="r"/>
+            <a:r>
+              <a:rPr sz="1000" b="0" i="0">
+                <a:solidFill>
+                  <a:srgbClr val="54595D"/>
+                </a:solidFill>
+                <a:latin typeface="Calibri"/>
+              </a:rPr>
+              <a:t>12</a:t>
+            </a:r>
+          </a:p>
+        </p:txBody>
+      </p:sp>
+      <p:sp>
+        <p:nvSpPr>
+          <p:cNvPr id="6" name="Rounded Rectangle 5"/>
+          <p:cNvSpPr/>
+          <p:nvPr/>
+        </p:nvSpPr>
+        <p:spPr>
+          <a:xfrm>
+            <a:off x="548640" y="1508760"/>
+            <a:ext cx="2011680" cy="457200"/>
+          </a:xfrm>
+          <a:prstGeom prst="roundRect">
+            <a:avLst>
+              <a:gd name="adj" fmla="val 50000"/>
+            </a:avLst>
+          </a:prstGeom>
+          <a:solidFill>
+            <a:srgbClr val="4EA1FF"/>
+          </a:solidFill>
+          <a:ln>
+            <a:noFill/>
+          </a:ln>
+          <a:effectLst/>
+        </p:spPr>
+        <p:style>
+          <a:lnRef idx="1">
+            <a:schemeClr val="accent1"/>
+          </a:lnRef>
+          <a:fillRef idx="3">
+            <a:schemeClr val="accent1"/>
+          </a:fillRef>
+          <a:effectRef idx="2">
+            <a:schemeClr val="accent1"/>
+          </a:effectRef>
+          <a:fontRef idx="minor">
+            <a:schemeClr val="lt1"/>
+          </a:fontRef>
+        </p:style>
+        <p:txBody>
+          <a:bodyPr rtlCol="0" anchor="ctr"/>
+          <a:lstStyle/>
+          <a:p/>
+        </p:txBody>
+      </p:sp>
+      <p:sp>
+        <p:nvSpPr>
+          <p:cNvPr id="7" name="TextBox 6"/>
+          <p:cNvSpPr txBox="1"/>
+          <p:nvPr/>
+        </p:nvSpPr>
+        <p:spPr>
+          <a:xfrm>
+            <a:off x="548640" y="1508760"/>
+            <a:ext cx="2011680" cy="457200"/>
+          </a:xfrm>
+          <a:prstGeom prst="rect">
+            <a:avLst/>
+          </a:prstGeom>
+          <a:noFill/>
+        </p:spPr>
+        <p:txBody>
+          <a:bodyPr wrap="square" anchor="ctr" lIns="0" rIns="0" tIns="0" bIns="0"/>
+          <a:lstStyle/>
+          <a:p>
+            <a:pPr algn="ctr"/>
+            <a:r>
+              <a:rPr sz="1400" b="1" i="0">
+                <a:solidFill>
+                  <a:srgbClr val="202122"/>
+                </a:solidFill>
+                <a:latin typeface="Calibri"/>
+              </a:rPr>
+              <a:t>35 minutes</a:t>
+            </a:r>
+          </a:p>
+        </p:txBody>
+      </p:sp>
+      <p:sp>
+        <p:nvSpPr>
+          <p:cNvPr id="8" name="TextBox 7"/>
+          <p:cNvSpPr txBox="1"/>
+          <p:nvPr/>
+        </p:nvSpPr>
+        <p:spPr>
+          <a:xfrm>
+            <a:off x="2743200" y="1508760"/>
+            <a:ext cx="4754880" cy="457200"/>
+          </a:xfrm>
+          <a:prstGeom prst="rect">
+            <a:avLst/>
+          </a:prstGeom>
+          <a:noFill/>
+        </p:spPr>
+        <p:txBody>
+          <a:bodyPr wrap="square" anchor="ctr" lIns="0" rIns="0" tIns="0" bIns="0"/>
+          <a:lstStyle/>
+          <a:p>
+            <a:pPr algn="l"/>
+            <a:r>
+              <a:rPr sz="1400" b="0" i="1">
+                <a:solidFill>
+                  <a:srgbClr val="54595D"/>
+                </a:solidFill>
+                <a:latin typeface="Calibri"/>
+              </a:rPr>
+              <a:t>Individual</a:t>
+            </a:r>
+          </a:p>
+        </p:txBody>
+      </p:sp>
+      <p:sp>
+        <p:nvSpPr>
+          <p:cNvPr id="9" name="Oval 8"/>
+          <p:cNvSpPr/>
+          <p:nvPr/>
+        </p:nvSpPr>
+        <p:spPr>
+          <a:xfrm>
+            <a:off x="548640" y="2482596"/>
+            <a:ext cx="384048" cy="384048"/>
+          </a:xfrm>
+          <a:prstGeom prst="ellipse">
+            <a:avLst/>
+          </a:prstGeom>
+          <a:solidFill>
+            <a:srgbClr val="0645AD"/>
+          </a:solidFill>
+          <a:ln>
+            <a:noFill/>
+          </a:ln>
+          <a:effectLst/>
+        </p:spPr>
+        <p:style>
+          <a:lnRef idx="1">
+            <a:schemeClr val="accent1"/>
+          </a:lnRef>
+          <a:fillRef idx="3">
+            <a:schemeClr val="accent1"/>
+          </a:fillRef>
+          <a:effectRef idx="2">
+            <a:schemeClr val="accent1"/>
+          </a:effectRef>
+          <a:fontRef idx="minor">
+            <a:schemeClr val="lt1"/>
+          </a:fontRef>
+        </p:style>
+        <p:txBody>
+          <a:bodyPr rtlCol="0" anchor="ctr" lIns="0" rIns="0" tIns="0" bIns="0"/>
+          <a:lstStyle/>
+          <a:p>
+            <a:pPr algn="ctr"/>
+            <a:r>
+              <a:rPr sz="1300" b="1">
+                <a:solidFill>
+                  <a:srgbClr val="FFFFFF"/>
+                </a:solidFill>
+                <a:latin typeface="Calibri"/>
+              </a:rPr>
+              <a:t>1</a:t>
+            </a:r>
+          </a:p>
+        </p:txBody>
+      </p:sp>
+      <p:sp>
+        <p:nvSpPr>
+          <p:cNvPr id="10" name="TextBox 9"/>
+          <p:cNvSpPr txBox="1"/>
+          <p:nvPr/>
+        </p:nvSpPr>
+        <p:spPr>
+          <a:xfrm>
+            <a:off x="1143000" y="2240280"/>
+            <a:ext cx="5943600" cy="868680"/>
+          </a:xfrm>
+          <a:prstGeom prst="rect">
+            <a:avLst/>
+          </a:prstGeom>
+          <a:noFill/>
+        </p:spPr>
+        <p:txBody>
+          <a:bodyPr wrap="square" anchor="ctr" lIns="0" rIns="0" tIns="0" bIns="0"/>
+          <a:lstStyle/>
+          <a:p>
+            <a:pPr algn="l"/>
+            <a:r>
+              <a:rPr sz="1700" b="0" i="0">
+                <a:solidFill>
+                  <a:srgbClr val="202122"/>
+                </a:solidFill>
+                <a:latin typeface="Calibri"/>
+              </a:rPr>
+              <a:t>Choose a task: setting up MFA, sharing a file securely, or booking a meeting room.</a:t>
+            </a:r>
+          </a:p>
+        </p:txBody>
+      </p:sp>
+      <p:sp>
+        <p:nvSpPr>
+          <p:cNvPr id="11" name="Oval 10"/>
+          <p:cNvSpPr/>
+          <p:nvPr/>
+        </p:nvSpPr>
+        <p:spPr>
+          <a:xfrm>
+            <a:off x="548640" y="3461004"/>
+            <a:ext cx="384048" cy="384048"/>
+          </a:xfrm>
+          <a:prstGeom prst="ellipse">
+            <a:avLst/>
+          </a:prstGeom>
+          <a:solidFill>
+            <a:srgbClr val="0645AD"/>
+          </a:solidFill>
+          <a:ln>
+            <a:noFill/>
+          </a:ln>
+          <a:effectLst/>
+        </p:spPr>
+        <p:style>
+          <a:lnRef idx="1">
+            <a:schemeClr val="accent1"/>
+          </a:lnRef>
+          <a:fillRef idx="3">
+            <a:schemeClr val="accent1"/>
+          </a:fillRef>
+          <a:effectRef idx="2">
+            <a:schemeClr val="accent1"/>
+          </a:effectRef>
+          <a:fontRef idx="minor">
+            <a:schemeClr val="lt1"/>
+          </a:fontRef>
+        </p:style>
+        <p:txBody>
+          <a:bodyPr rtlCol="0" anchor="ctr" lIns="0" rIns="0" tIns="0" bIns="0"/>
+          <a:lstStyle/>
+          <a:p>
+            <a:pPr algn="ctr"/>
+            <a:r>
+              <a:rPr sz="1300" b="1">
+                <a:solidFill>
+                  <a:srgbClr val="FFFFFF"/>
+                </a:solidFill>
+                <a:latin typeface="Calibri"/>
+              </a:rPr>
+              <a:t>2</a:t>
+            </a:r>
+          </a:p>
+        </p:txBody>
+      </p:sp>
+      <p:sp>
+        <p:nvSpPr>
+          <p:cNvPr id="12" name="TextBox 11"/>
+          <p:cNvSpPr txBox="1"/>
+          <p:nvPr/>
+        </p:nvSpPr>
+        <p:spPr>
+          <a:xfrm>
+            <a:off x="1143000" y="3218688"/>
+            <a:ext cx="5943600" cy="868680"/>
+          </a:xfrm>
+          <a:prstGeom prst="rect">
+            <a:avLst/>
+          </a:prstGeom>
+          <a:noFill/>
+        </p:spPr>
+        <p:txBody>
+          <a:bodyPr wrap="square" anchor="ctr" lIns="0" rIns="0" tIns="0" bIns="0"/>
+          <a:lstStyle/>
+          <a:p>
+            <a:pPr algn="l"/>
+            <a:r>
+              <a:rPr sz="1700" b="0" i="0">
+                <a:solidFill>
+                  <a:srgbClr val="202122"/>
+                </a:solidFill>
+                <a:latin typeface="Calibri"/>
+              </a:rPr>
+              <a:t>Write a one-page crib sheet for a non-technical user.</a:t>
+            </a:r>
+          </a:p>
+        </p:txBody>
+      </p:sp>
+      <p:sp>
+        <p:nvSpPr>
+          <p:cNvPr id="13" name="Oval 12"/>
+          <p:cNvSpPr/>
+          <p:nvPr/>
+        </p:nvSpPr>
+        <p:spPr>
+          <a:xfrm>
+            <a:off x="548640" y="4439412"/>
+            <a:ext cx="384048" cy="384048"/>
+          </a:xfrm>
+          <a:prstGeom prst="ellipse">
+            <a:avLst/>
+          </a:prstGeom>
+          <a:solidFill>
+            <a:srgbClr val="0645AD"/>
+          </a:solidFill>
+          <a:ln>
+            <a:noFill/>
+          </a:ln>
+          <a:effectLst/>
+        </p:spPr>
+        <p:style>
+          <a:lnRef idx="1">
+            <a:schemeClr val="accent1"/>
+          </a:lnRef>
+          <a:fillRef idx="3">
+            <a:schemeClr val="accent1"/>
+          </a:fillRef>
+          <a:effectRef idx="2">
+            <a:schemeClr val="accent1"/>
+          </a:effectRef>
+          <a:fontRef idx="minor">
+            <a:schemeClr val="lt1"/>
+          </a:fontRef>
+        </p:style>
+        <p:txBody>
+          <a:bodyPr rtlCol="0" anchor="ctr" lIns="0" rIns="0" tIns="0" bIns="0"/>
+          <a:lstStyle/>
+          <a:p>
+            <a:pPr algn="ctr"/>
+            <a:r>
+              <a:rPr sz="1300" b="1">
+                <a:solidFill>
+                  <a:srgbClr val="FFFFFF"/>
+                </a:solidFill>
+                <a:latin typeface="Calibri"/>
+              </a:rPr>
+              <a:t>3</a:t>
+            </a:r>
+          </a:p>
+        </p:txBody>
+      </p:sp>
+      <p:sp>
+        <p:nvSpPr>
+          <p:cNvPr id="14" name="TextBox 13"/>
+          <p:cNvSpPr txBox="1"/>
+          <p:nvPr/>
+        </p:nvSpPr>
+        <p:spPr>
+          <a:xfrm>
+            <a:off x="1143000" y="4197096"/>
+            <a:ext cx="5943600" cy="868680"/>
+          </a:xfrm>
+          <a:prstGeom prst="rect">
+            <a:avLst/>
+          </a:prstGeom>
+          <a:noFill/>
+        </p:spPr>
+        <p:txBody>
+          <a:bodyPr wrap="square" anchor="ctr" lIns="0" rIns="0" tIns="0" bIns="0"/>
+          <a:lstStyle/>
+          <a:p>
+            <a:pPr algn="l"/>
+            <a:r>
+              <a:rPr sz="1700" b="0" i="0">
+                <a:solidFill>
+                  <a:srgbClr val="202122"/>
+                </a:solidFill>
+                <a:latin typeface="Calibri"/>
+              </a:rPr>
+              <a:t>Record a screencast of under two minutes showing the task.</a:t>
+            </a:r>
+          </a:p>
+        </p:txBody>
+      </p:sp>
+      <p:sp>
+        <p:nvSpPr>
+          <p:cNvPr id="15" name="Oval 14"/>
+          <p:cNvSpPr/>
+          <p:nvPr/>
+        </p:nvSpPr>
+        <p:spPr>
+          <a:xfrm>
+            <a:off x="548640" y="5417820"/>
+            <a:ext cx="384048" cy="384048"/>
+          </a:xfrm>
+          <a:prstGeom prst="ellipse">
+            <a:avLst/>
+          </a:prstGeom>
+          <a:solidFill>
+            <a:srgbClr val="0645AD"/>
+          </a:solidFill>
+          <a:ln>
+            <a:noFill/>
+          </a:ln>
+          <a:effectLst/>
+        </p:spPr>
+        <p:style>
+          <a:lnRef idx="1">
+            <a:schemeClr val="accent1"/>
+          </a:lnRef>
+          <a:fillRef idx="3">
+            <a:schemeClr val="accent1"/>
+          </a:fillRef>
+          <a:effectRef idx="2">
+            <a:schemeClr val="accent1"/>
+          </a:effectRef>
+          <a:fontRef idx="minor">
+            <a:schemeClr val="lt1"/>
+          </a:fontRef>
+        </p:style>
+        <p:txBody>
+          <a:bodyPr rtlCol="0" anchor="ctr" lIns="0" rIns="0" tIns="0" bIns="0"/>
+          <a:lstStyle/>
+          <a:p>
+            <a:pPr algn="ctr"/>
+            <a:r>
+              <a:rPr sz="1300" b="1">
+                <a:solidFill>
+                  <a:srgbClr val="FFFFFF"/>
+                </a:solidFill>
+                <a:latin typeface="Calibri"/>
+              </a:rPr>
+              <a:t>4</a:t>
+            </a:r>
+          </a:p>
+        </p:txBody>
+      </p:sp>
+      <p:sp>
+        <p:nvSpPr>
+          <p:cNvPr id="16" name="TextBox 15"/>
+          <p:cNvSpPr txBox="1"/>
+          <p:nvPr/>
+        </p:nvSpPr>
+        <p:spPr>
+          <a:xfrm>
+            <a:off x="1143000" y="5175504"/>
+            <a:ext cx="5943600" cy="868680"/>
+          </a:xfrm>
+          <a:prstGeom prst="rect">
+            <a:avLst/>
+          </a:prstGeom>
+          <a:noFill/>
+        </p:spPr>
+        <p:txBody>
+          <a:bodyPr wrap="square" anchor="ctr" lIns="0" rIns="0" tIns="0" bIns="0"/>
+          <a:lstStyle/>
+          <a:p>
+            <a:pPr algn="l"/>
+            <a:r>
+              <a:rPr sz="1700" b="0" i="0">
+                <a:solidFill>
+                  <a:srgbClr val="202122"/>
+                </a:solidFill>
+                <a:latin typeface="Calibri"/>
+              </a:rPr>
+              <a:t>Get feedback from a partner and improve one thing.</a:t>
+            </a:r>
+          </a:p>
+        </p:txBody>
+      </p:sp>
+      <p:sp>
+        <p:nvSpPr>
+          <p:cNvPr id="17" name="Rounded Rectangle 16"/>
+          <p:cNvSpPr/>
+          <p:nvPr/>
+        </p:nvSpPr>
+        <p:spPr>
+          <a:xfrm>
+            <a:off x="7772400" y="1508760"/>
+            <a:ext cx="3867912" cy="4572000"/>
+          </a:xfrm>
+          <a:prstGeom prst="roundRect">
+            <a:avLst>
+              <a:gd name="adj" fmla="val 8000"/>
+            </a:avLst>
+          </a:prstGeom>
+          <a:solidFill>
+            <a:srgbClr val="EAF3FF"/>
+          </a:solidFill>
+          <a:ln>
+            <a:noFill/>
+          </a:ln>
+          <a:effectLst/>
+        </p:spPr>
+        <p:style>
+          <a:lnRef idx="1">
+            <a:schemeClr val="accent1"/>
+          </a:lnRef>
+          <a:fillRef idx="3">
+            <a:schemeClr val="accent1"/>
+          </a:fillRef>
+          <a:effectRef idx="2">
+            <a:schemeClr val="accent1"/>
+          </a:effectRef>
+          <a:fontRef idx="minor">
+            <a:schemeClr val="lt1"/>
+          </a:fontRef>
+        </p:style>
+        <p:txBody>
+          <a:bodyPr rtlCol="0" anchor="ctr"/>
+          <a:lstStyle/>
+          <a:p/>
+        </p:txBody>
+      </p:sp>
+      <p:sp>
+        <p:nvSpPr>
+          <p:cNvPr id="18" name="TextBox 17"/>
+          <p:cNvSpPr txBox="1"/>
+          <p:nvPr/>
+        </p:nvSpPr>
+        <p:spPr>
+          <a:xfrm>
+            <a:off x="8046720" y="1737360"/>
+            <a:ext cx="3291840" cy="365760"/>
+          </a:xfrm>
+          <a:prstGeom prst="rect">
+            <a:avLst/>
+          </a:prstGeom>
+          <a:noFill/>
+        </p:spPr>
+        <p:txBody>
+          <a:bodyPr wrap="square" anchor="t" lIns="0" rIns="0" tIns="0" bIns="0"/>
+          <a:lstStyle/>
+          <a:p>
+            <a:pPr algn="l"/>
+            <a:r>
+              <a:rPr sz="1300" b="1" i="0">
+                <a:solidFill>
+                  <a:srgbClr val="0645AD"/>
+                </a:solidFill>
+                <a:latin typeface="Calibri"/>
+              </a:rPr>
+              <a:t>SUCCESS CRITERIA</a:t>
+            </a:r>
+          </a:p>
+        </p:txBody>
+      </p:sp>
+      <p:sp>
+        <p:nvSpPr>
+          <p:cNvPr id="19" name="TextBox 18"/>
+          <p:cNvSpPr txBox="1"/>
+          <p:nvPr/>
+        </p:nvSpPr>
+        <p:spPr>
+          <a:xfrm>
+            <a:off x="8046720" y="2240280"/>
+            <a:ext cx="3337560" cy="3657600"/>
+          </a:xfrm>
+          <a:prstGeom prst="rect">
+            <a:avLst/>
+          </a:prstGeom>
+          <a:noFill/>
+        </p:spPr>
+        <p:txBody>
+          <a:bodyPr wrap="square" lIns="0" rIns="0" tIns="0" bIns="0">
+            <a:spAutoFit/>
+          </a:bodyPr>
+          <a:lstStyle/>
+          <a:p>
+            <a:pPr marL="274320" indent="-274320">
+              <a:spcAft>
+                <a:spcPts val="810"/>
+              </a:spcAft>
+              <a:buClr>
+                <a:srgbClr val="0645AD"/>
+              </a:buClr>
+              <a:buFont typeface="Arial"/>
+              <a:buChar char="•"/>
+            </a:pPr>
+            <a:r>
+              <a:rPr sz="1800" b="0">
+                <a:solidFill>
+                  <a:srgbClr val="202122"/>
+                </a:solidFill>
+                <a:latin typeface="Calibri"/>
+              </a:rPr>
+              <a:t>Steps are numbered and jargon-free</a:t>
+            </a:r>
+          </a:p>
+          <a:p>
+            <a:pPr marL="274320" indent="-274320">
+              <a:spcAft>
+                <a:spcPts val="810"/>
+              </a:spcAft>
+              <a:buClr>
+                <a:srgbClr val="0645AD"/>
+              </a:buClr>
+              <a:buFont typeface="Arial"/>
+              <a:buChar char="•"/>
+            </a:pPr>
+            <a:r>
+              <a:rPr sz="1800" b="0">
+                <a:solidFill>
+                  <a:srgbClr val="202122"/>
+                </a:solidFill>
+                <a:latin typeface="Calibri"/>
+              </a:rPr>
+              <a:t>Screenshots or recording match the steps</a:t>
+            </a:r>
+          </a:p>
+          <a:p>
+            <a:pPr marL="274320" indent="-274320">
+              <a:spcAft>
+                <a:spcPts val="810"/>
+              </a:spcAft>
+              <a:buClr>
+                <a:srgbClr val="0645AD"/>
+              </a:buClr>
+              <a:buFont typeface="Arial"/>
+              <a:buChar char="•"/>
+            </a:pPr>
+            <a:r>
+              <a:rPr sz="1800" b="0">
+                <a:solidFill>
+                  <a:srgbClr val="202122"/>
+                </a:solidFill>
+                <a:latin typeface="Calibri"/>
+              </a:rPr>
+              <a:t>Feedback acted on</a:t>
+            </a:r>
+          </a:p>
+        </p:txBody>
+      </p:sp>
+    </p:spTree>
+  </p:cSld>
+  <p:clrMapOvr>
+    <a:masterClrMapping/>
+  </p:clrMapOvr>
+</p:sld>
+</file>
+
+<file path=ppt/slides/slide13.xml><?xml version="1.0" encoding="utf-8"?>
+<p:sld xmlns:a="http://schemas.openxmlformats.org/drawingml/2006/main" xmlns:p="http://schemas.openxmlformats.org/presentationml/2006/main" xmlns:r="http://schemas.openxmlformats.org/officeDocument/2006/relationships">
+  <p:cSld>
+    <p:bg>
+      <p:bgPr>
+        <a:solidFill>
+          <a:srgbClr val="03306E"/>
+        </a:solidFill>
+        <a:effectLst/>
+      </p:bgPr>
+    </p:bg>
+    <p:spTree>
+      <p:nvGrpSpPr>
+        <p:cNvPr id="1" name=""/>
+        <p:cNvGrpSpPr/>
+        <p:nvPr/>
+      </p:nvGrpSpPr>
+      <p:grpSpPr/>
+      <p:sp>
+        <p:nvSpPr>
+          <p:cNvPr id="2" name="TextBox 1"/>
+          <p:cNvSpPr txBox="1"/>
+          <p:nvPr/>
+        </p:nvSpPr>
+        <p:spPr>
+          <a:xfrm>
+            <a:off x="548640" y="320040"/>
+            <a:ext cx="11094415" cy="274320"/>
+          </a:xfrm>
+          <a:prstGeom prst="rect">
+            <a:avLst/>
+          </a:prstGeom>
+          <a:noFill/>
+        </p:spPr>
+        <p:txBody>
+          <a:bodyPr wrap="square" anchor="t" lIns="0" rIns="0" tIns="0" bIns="0"/>
+          <a:lstStyle/>
+          <a:p>
+            <a:pPr algn="l"/>
+            <a:r>
+              <a:rPr sz="1100" b="1" i="0">
+                <a:solidFill>
+                  <a:srgbClr val="A9C8F0"/>
+                </a:solidFill>
+                <a:latin typeface="Calibri"/>
+              </a:rPr>
+              <a:t>DIGITAL SUPPORT  ·  Digital Support Content Area 2</a:t>
+            </a:r>
+          </a:p>
+        </p:txBody>
+      </p:sp>
+      <p:sp>
+        <p:nvSpPr>
+          <p:cNvPr id="3" name="TextBox 2"/>
+          <p:cNvSpPr txBox="1"/>
+          <p:nvPr/>
+        </p:nvSpPr>
+        <p:spPr>
+          <a:xfrm>
+            <a:off x="548640" y="566928"/>
+            <a:ext cx="11094415" cy="822960"/>
+          </a:xfrm>
+          <a:prstGeom prst="rect">
+            <a:avLst/>
+          </a:prstGeom>
+          <a:noFill/>
+        </p:spPr>
+        <p:txBody>
+          <a:bodyPr wrap="square" anchor="ctr" lIns="0" rIns="0" tIns="0" bIns="0"/>
+          <a:lstStyle/>
+          <a:p>
+            <a:pPr algn="l"/>
+            <a:r>
+              <a:rPr sz="3200" b="1" i="0">
+                <a:solidFill>
+                  <a:srgbClr val="FFFFFF"/>
+                </a:solidFill>
+                <a:latin typeface="Cambria"/>
+              </a:rPr>
+              <a:t>Exit ticket</a:t>
+            </a:r>
+          </a:p>
+        </p:txBody>
+      </p:sp>
+      <p:sp>
+        <p:nvSpPr>
+          <p:cNvPr id="4" name="Oval 3"/>
+          <p:cNvSpPr/>
+          <p:nvPr/>
+        </p:nvSpPr>
+        <p:spPr>
+          <a:xfrm>
+            <a:off x="548640" y="1737360"/>
+            <a:ext cx="502920" cy="502920"/>
+          </a:xfrm>
+          <a:prstGeom prst="ellipse">
+            <a:avLst/>
+          </a:prstGeom>
+          <a:solidFill>
+            <a:srgbClr val="4EA1FF"/>
+          </a:solidFill>
+          <a:ln>
+            <a:noFill/>
+          </a:ln>
+          <a:effectLst/>
+        </p:spPr>
+        <p:style>
+          <a:lnRef idx="1">
+            <a:schemeClr val="accent1"/>
+          </a:lnRef>
+          <a:fillRef idx="3">
+            <a:schemeClr val="accent1"/>
+          </a:fillRef>
+          <a:effectRef idx="2">
+            <a:schemeClr val="accent1"/>
+          </a:effectRef>
+          <a:fontRef idx="minor">
+            <a:schemeClr val="lt1"/>
+          </a:fontRef>
+        </p:style>
+        <p:txBody>
+          <a:bodyPr rtlCol="0" anchor="ctr" lIns="0" rIns="0" tIns="0" bIns="0"/>
+          <a:lstStyle/>
+          <a:p>
+            <a:pPr algn="ctr"/>
+            <a:r>
+              <a:rPr sz="1700" b="1">
+                <a:solidFill>
+                  <a:srgbClr val="202122"/>
+                </a:solidFill>
+                <a:latin typeface="Calibri"/>
+              </a:rPr>
+              <a:t>1</a:t>
+            </a:r>
+          </a:p>
+        </p:txBody>
+      </p:sp>
+      <p:sp>
+        <p:nvSpPr>
+          <p:cNvPr id="5" name="TextBox 4"/>
+          <p:cNvSpPr txBox="1"/>
+          <p:nvPr/>
+        </p:nvSpPr>
+        <p:spPr>
+          <a:xfrm>
+            <a:off x="1325880" y="1645920"/>
+            <a:ext cx="6583680" cy="822960"/>
+          </a:xfrm>
+          <a:prstGeom prst="rect">
+            <a:avLst/>
+          </a:prstGeom>
+          <a:noFill/>
+        </p:spPr>
+        <p:txBody>
+          <a:bodyPr wrap="square" anchor="ctr" lIns="0" rIns="0" tIns="0" bIns="0"/>
+          <a:lstStyle/>
+          <a:p>
+            <a:pPr algn="l"/>
+            <a:r>
+              <a:rPr sz="2000" b="0" i="0">
+                <a:solidFill>
+                  <a:srgbClr val="FFFFFF"/>
+                </a:solidFill>
+                <a:latin typeface="Calibri"/>
+              </a:rPr>
+              <a:t>Which training method suits a busy manager?</a:t>
+            </a:r>
+          </a:p>
+        </p:txBody>
+      </p:sp>
+      <p:sp>
+        <p:nvSpPr>
+          <p:cNvPr id="6" name="Oval 5"/>
+          <p:cNvSpPr/>
+          <p:nvPr/>
+        </p:nvSpPr>
+        <p:spPr>
+          <a:xfrm>
+            <a:off x="548640" y="2697480"/>
+            <a:ext cx="502920" cy="502920"/>
+          </a:xfrm>
+          <a:prstGeom prst="ellipse">
+            <a:avLst/>
+          </a:prstGeom>
+          <a:solidFill>
+            <a:srgbClr val="4EA1FF"/>
+          </a:solidFill>
+          <a:ln>
+            <a:noFill/>
+          </a:ln>
+          <a:effectLst/>
+        </p:spPr>
+        <p:style>
+          <a:lnRef idx="1">
+            <a:schemeClr val="accent1"/>
+          </a:lnRef>
+          <a:fillRef idx="3">
+            <a:schemeClr val="accent1"/>
+          </a:fillRef>
+          <a:effectRef idx="2">
+            <a:schemeClr val="accent1"/>
+          </a:effectRef>
+          <a:fontRef idx="minor">
+            <a:schemeClr val="lt1"/>
+          </a:fontRef>
+        </p:style>
+        <p:txBody>
+          <a:bodyPr rtlCol="0" anchor="ctr" lIns="0" rIns="0" tIns="0" bIns="0"/>
+          <a:lstStyle/>
+          <a:p>
+            <a:pPr algn="ctr"/>
+            <a:r>
+              <a:rPr sz="1700" b="1">
+                <a:solidFill>
+                  <a:srgbClr val="202122"/>
+                </a:solidFill>
+                <a:latin typeface="Calibri"/>
+              </a:rPr>
+              <a:t>2</a:t>
+            </a:r>
+          </a:p>
+        </p:txBody>
+      </p:sp>
+      <p:sp>
+        <p:nvSpPr>
+          <p:cNvPr id="7" name="TextBox 6"/>
+          <p:cNvSpPr txBox="1"/>
+          <p:nvPr/>
+        </p:nvSpPr>
+        <p:spPr>
+          <a:xfrm>
+            <a:off x="1325880" y="2606040"/>
+            <a:ext cx="6583680" cy="822960"/>
+          </a:xfrm>
+          <a:prstGeom prst="rect">
+            <a:avLst/>
+          </a:prstGeom>
+          <a:noFill/>
+        </p:spPr>
+        <p:txBody>
+          <a:bodyPr wrap="square" anchor="ctr" lIns="0" rIns="0" tIns="0" bIns="0"/>
+          <a:lstStyle/>
+          <a:p>
+            <a:pPr algn="l"/>
+            <a:r>
+              <a:rPr sz="2000" b="0" i="0">
+                <a:solidFill>
+                  <a:srgbClr val="FFFFFF"/>
+                </a:solidFill>
+                <a:latin typeface="Calibri"/>
+              </a:rPr>
+              <a:t>Why does CPD matter for support staff?</a:t>
+            </a:r>
+          </a:p>
+        </p:txBody>
+      </p:sp>
+      <p:sp>
+        <p:nvSpPr>
+          <p:cNvPr id="8" name="Oval 7"/>
+          <p:cNvSpPr/>
+          <p:nvPr/>
+        </p:nvSpPr>
+        <p:spPr>
+          <a:xfrm>
+            <a:off x="548640" y="3657600"/>
+            <a:ext cx="502920" cy="502920"/>
+          </a:xfrm>
+          <a:prstGeom prst="ellipse">
+            <a:avLst/>
+          </a:prstGeom>
+          <a:solidFill>
+            <a:srgbClr val="4EA1FF"/>
+          </a:solidFill>
+          <a:ln>
+            <a:noFill/>
+          </a:ln>
+          <a:effectLst/>
+        </p:spPr>
+        <p:style>
+          <a:lnRef idx="1">
+            <a:schemeClr val="accent1"/>
+          </a:lnRef>
+          <a:fillRef idx="3">
+            <a:schemeClr val="accent1"/>
+          </a:fillRef>
+          <a:effectRef idx="2">
+            <a:schemeClr val="accent1"/>
+          </a:effectRef>
+          <a:fontRef idx="minor">
+            <a:schemeClr val="lt1"/>
+          </a:fontRef>
+        </p:style>
+        <p:txBody>
+          <a:bodyPr rtlCol="0" anchor="ctr" lIns="0" rIns="0" tIns="0" bIns="0"/>
+          <a:lstStyle/>
+          <a:p>
+            <a:pPr algn="ctr"/>
+            <a:r>
+              <a:rPr sz="1700" b="1">
+                <a:solidFill>
+                  <a:srgbClr val="202122"/>
+                </a:solidFill>
+                <a:latin typeface="Calibri"/>
+              </a:rPr>
+              <a:t>3</a:t>
+            </a:r>
+          </a:p>
+        </p:txBody>
+      </p:sp>
+      <p:sp>
+        <p:nvSpPr>
+          <p:cNvPr id="9" name="TextBox 8"/>
+          <p:cNvSpPr txBox="1"/>
+          <p:nvPr/>
+        </p:nvSpPr>
+        <p:spPr>
+          <a:xfrm>
+            <a:off x="1325880" y="3566160"/>
+            <a:ext cx="6583680" cy="822960"/>
+          </a:xfrm>
+          <a:prstGeom prst="rect">
+            <a:avLst/>
+          </a:prstGeom>
+          <a:noFill/>
+        </p:spPr>
+        <p:txBody>
+          <a:bodyPr wrap="square" anchor="ctr" lIns="0" rIns="0" tIns="0" bIns="0"/>
+          <a:lstStyle/>
+          <a:p>
+            <a:pPr algn="l"/>
+            <a:r>
+              <a:rPr sz="2000" b="0" i="0">
+                <a:solidFill>
+                  <a:srgbClr val="FFFFFF"/>
+                </a:solidFill>
+                <a:latin typeface="Calibri"/>
+              </a:rPr>
+              <a:t>How would you explain the benefit of a CRM to a sales team?</a:t>
+            </a:r>
+          </a:p>
+        </p:txBody>
+      </p:sp>
+      <p:sp>
+        <p:nvSpPr>
+          <p:cNvPr id="10" name="Rounded Rectangle 9"/>
+          <p:cNvSpPr/>
+          <p:nvPr/>
+        </p:nvSpPr>
+        <p:spPr>
+          <a:xfrm>
+            <a:off x="8229600" y="1645920"/>
+            <a:ext cx="3410712" cy="2926080"/>
+          </a:xfrm>
+          <a:prstGeom prst="roundRect">
+            <a:avLst>
+              <a:gd name="adj" fmla="val 8000"/>
+            </a:avLst>
+          </a:prstGeom>
+          <a:solidFill>
+            <a:srgbClr val="0645AD"/>
+          </a:solidFill>
+          <a:ln>
+            <a:noFill/>
+          </a:ln>
+          <a:effectLst/>
+        </p:spPr>
+        <p:style>
+          <a:lnRef idx="1">
+            <a:schemeClr val="accent1"/>
+          </a:lnRef>
+          <a:fillRef idx="3">
+            <a:schemeClr val="accent1"/>
+          </a:fillRef>
+          <a:effectRef idx="2">
+            <a:schemeClr val="accent1"/>
+          </a:effectRef>
+          <a:fontRef idx="minor">
+            <a:schemeClr val="lt1"/>
+          </a:fontRef>
+        </p:style>
+        <p:txBody>
+          <a:bodyPr rtlCol="0" anchor="ctr"/>
+          <a:lstStyle/>
+          <a:p/>
+        </p:txBody>
+      </p:sp>
+      <p:sp>
+        <p:nvSpPr>
+          <p:cNvPr id="11" name="TextBox 10"/>
+          <p:cNvSpPr txBox="1"/>
+          <p:nvPr/>
+        </p:nvSpPr>
+        <p:spPr>
+          <a:xfrm>
+            <a:off x="8503920" y="1874519"/>
+            <a:ext cx="2926080" cy="365760"/>
+          </a:xfrm>
+          <a:prstGeom prst="rect">
+            <a:avLst/>
+          </a:prstGeom>
+          <a:noFill/>
+        </p:spPr>
+        <p:txBody>
+          <a:bodyPr wrap="square" anchor="t" lIns="0" rIns="0" tIns="0" bIns="0"/>
+          <a:lstStyle/>
+          <a:p>
+            <a:pPr algn="l"/>
+            <a:r>
+              <a:rPr sz="1300" b="1" i="0">
+                <a:solidFill>
+                  <a:srgbClr val="A9C8F0"/>
+                </a:solidFill>
+                <a:latin typeface="Calibri"/>
+              </a:rPr>
+              <a:t>REVISE THIS TOPIC</a:t>
+            </a:r>
+          </a:p>
+        </p:txBody>
+      </p:sp>
+      <p:sp>
+        <p:nvSpPr>
+          <p:cNvPr id="12" name="TextBox 11"/>
+          <p:cNvSpPr txBox="1"/>
+          <p:nvPr/>
+        </p:nvSpPr>
+        <p:spPr>
+          <a:xfrm>
+            <a:off x="8503920" y="2286000"/>
+            <a:ext cx="2926080" cy="548640"/>
+          </a:xfrm>
+          <a:prstGeom prst="rect">
+            <a:avLst/>
+          </a:prstGeom>
+          <a:noFill/>
+        </p:spPr>
+        <p:txBody>
+          <a:bodyPr wrap="square" anchor="t" lIns="0" rIns="0" tIns="0" bIns="0"/>
+          <a:lstStyle/>
+          <a:p>
+            <a:pPr algn="l"/>
+            <a:r>
+              <a:rPr sz="1400" b="0" i="0">
+                <a:solidFill>
+                  <a:srgbClr val="FFFFFF"/>
+                </a:solidFill>
+                <a:latin typeface="Calibri"/>
+              </a:rPr>
+              <a:t>Revision notes for this lesson are on the study wiki:</a:t>
+            </a:r>
+          </a:p>
+        </p:txBody>
+      </p:sp>
+      <p:sp>
+        <p:nvSpPr>
+          <p:cNvPr id="13" name="TextBox 12"/>
+          <p:cNvSpPr txBox="1"/>
+          <p:nvPr/>
+        </p:nvSpPr>
+        <p:spPr>
+          <a:xfrm>
+            <a:off x="8503920" y="2926080"/>
+            <a:ext cx="2926080" cy="1463040"/>
+          </a:xfrm>
+          <a:prstGeom prst="rect">
+            <a:avLst/>
+          </a:prstGeom>
+          <a:noFill/>
+        </p:spPr>
+        <p:txBody>
+          <a:bodyPr wrap="square" anchor="t" lIns="0" rIns="0" tIns="0" bIns="0"/>
+          <a:lstStyle/>
+          <a:p>
+            <a:pPr algn="l"/>
+            <a:r>
+              <a:rPr sz="1900" b="1" i="0">
+                <a:solidFill>
+                  <a:srgbClr val="FFFFFF"/>
+                </a:solidFill>
+                <a:latin typeface="Cambria"/>
+              </a:rPr>
+              <a:t>Digital Support - Installing, Configuring and Supporting Software and Operating Systems</a:t>
+            </a:r>
+          </a:p>
+        </p:txBody>
+      </p:sp>
+      <p:sp>
+        <p:nvSpPr>
+          <p:cNvPr id="14" name="TextBox 13"/>
+          <p:cNvSpPr txBox="1"/>
+          <p:nvPr/>
+        </p:nvSpPr>
+        <p:spPr>
+          <a:xfrm>
+            <a:off x="548640" y="5669280"/>
+            <a:ext cx="11094415" cy="548640"/>
+          </a:xfrm>
+          <a:prstGeom prst="rect">
+            <a:avLst/>
+          </a:prstGeom>
+          <a:noFill/>
+        </p:spPr>
+        <p:txBody>
+          <a:bodyPr wrap="square" anchor="t" lIns="0" rIns="0" tIns="0" bIns="0"/>
+          <a:lstStyle/>
+          <a:p>
+            <a:pPr algn="l"/>
+            <a:r>
+              <a:rPr sz="1200" b="0" i="0">
+                <a:solidFill>
+                  <a:srgbClr val="A9C8F0"/>
+                </a:solidFill>
+                <a:latin typeface="Calibri"/>
+              </a:rPr>
+              <a:t>https://lana6478.github.io/Digital-Suport-and-security-T-levle/#/02-occupational-specialisms/digital-support/02-software-and-os-support.md</a:t>
             </a:r>
           </a:p>
         </p:txBody>
@@ -5225,20 +7748,102 @@
       </p:sp>
       <p:sp>
         <p:nvSpPr>
-          <p:cNvPr id="6" name="Rectangle 5"/>
+          <p:cNvPr id="6" name="TextBox 5"/>
+          <p:cNvSpPr txBox="1"/>
+          <p:nvPr/>
+        </p:nvSpPr>
+        <p:spPr>
+          <a:xfrm>
+            <a:off x="548640" y="1554480"/>
+            <a:ext cx="6720840" cy="4617720"/>
+          </a:xfrm>
+          <a:prstGeom prst="rect">
+            <a:avLst/>
+          </a:prstGeom>
+          <a:noFill/>
+        </p:spPr>
+        <p:txBody>
+          <a:bodyPr wrap="square" lIns="0" rIns="0" tIns="0" bIns="0">
+            <a:spAutoFit/>
+          </a:bodyPr>
+          <a:lstStyle/>
+          <a:p>
+            <a:pPr>
+              <a:spcAft>
+                <a:spcPts val="1320"/>
+              </a:spcAft>
+            </a:pPr>
+            <a:r>
+              <a:rPr sz="2200" b="0">
+                <a:solidFill>
+                  <a:srgbClr val="202122"/>
+                </a:solidFill>
+                <a:latin typeface="Calibri"/>
+              </a:rPr>
+              <a:t>Support staff often have to recommend and explain technology to people who aren't technical.</a:t>
+            </a:r>
+          </a:p>
+          <a:p>
+            <a:pPr>
+              <a:spcAft>
+                <a:spcPts val="1320"/>
+              </a:spcAft>
+            </a:pPr>
+            <a:r>
+              <a:rPr sz="2200" b="1">
+                <a:solidFill>
+                  <a:srgbClr val="202122"/>
+                </a:solidFill>
+                <a:latin typeface="Calibri"/>
+              </a:rPr>
+              <a:t>First analyse the requirement:</a:t>
+            </a:r>
+            <a:r>
+              <a:rPr sz="2200" b="0">
+                <a:solidFill>
+                  <a:srgbClr val="202122"/>
+                </a:solidFill>
+                <a:latin typeface="Calibri"/>
+              </a:rPr>
+              <a:t> what do they need to do, such as access information, use a service or complete transactions? Then identify the best-fit solution: a digital system, productivity software or wider digital technology. Finally explain the benefit clearly and concisely, pitched at your audience, using the correct technical terms but explaining any jargon.</a:t>
+            </a:r>
+          </a:p>
+          <a:p>
+            <a:pPr>
+              <a:spcAft>
+                <a:spcPts val="1320"/>
+              </a:spcAft>
+            </a:pPr>
+            <a:r>
+              <a:rPr sz="2200" b="0">
+                <a:solidFill>
+                  <a:srgbClr val="202122"/>
+                </a:solidFill>
+                <a:latin typeface="Calibri"/>
+              </a:rPr>
+              <a:t>Focus on what it does for them, not how clever it is.</a:t>
+            </a:r>
+          </a:p>
+        </p:txBody>
+      </p:sp>
+      <p:sp>
+        <p:nvSpPr>
+          <p:cNvPr id="7" name="Rounded Rectangle 6"/>
           <p:cNvSpPr/>
           <p:nvPr/>
         </p:nvSpPr>
         <p:spPr>
           <a:xfrm>
-            <a:off x="2351989" y="2793492"/>
-            <a:ext cx="7487716" cy="36576"/>
-          </a:xfrm>
-          <a:prstGeom prst="rect">
-            <a:avLst/>
+            <a:off x="7772400" y="1554480"/>
+            <a:ext cx="3867912" cy="4526280"/>
+          </a:xfrm>
+          <a:prstGeom prst="roundRect">
+            <a:avLst>
+              <a:gd name="adj" fmla="val 8000"/>
+            </a:avLst>
           </a:prstGeom>
           <a:solidFill>
-            <a:srgbClr val="A9C8F0"/>
+            <a:srgbClr val="03306E"/>
           </a:solidFill>
           <a:ln>
             <a:noFill/>
@@ -5267,14 +7872,14 @@
       </p:sp>
       <p:sp>
         <p:nvSpPr>
-          <p:cNvPr id="7" name="Oval 6"/>
+          <p:cNvPr id="8" name="Oval 7"/>
           <p:cNvSpPr/>
           <p:nvPr/>
         </p:nvSpPr>
         <p:spPr>
           <a:xfrm>
-            <a:off x="2031949" y="2491740"/>
-            <a:ext cx="640080" cy="640080"/>
+            <a:off x="8046720" y="1828800"/>
+            <a:ext cx="548640" cy="548640"/>
           </a:xfrm>
           <a:prstGeom prst="ellipse">
             <a:avLst/>
@@ -5307,27 +7912,27 @@
           <a:p>
             <a:pPr algn="ctr"/>
             <a:r>
-              <a:rPr sz="2000" b="1">
+              <a:rPr sz="1300" b="1">
                 <a:solidFill>
                   <a:srgbClr val="202122"/>
                 </a:solidFill>
                 <a:latin typeface="Calibri"/>
               </a:rPr>
-              <a:t>1</a:t>
-            </a:r>
-          </a:p>
-        </p:txBody>
-      </p:sp>
-      <p:sp>
-        <p:nvSpPr>
-          <p:cNvPr id="8" name="TextBox 7"/>
+              <a:t>e.g.</a:t>
+            </a:r>
+          </a:p>
+        </p:txBody>
+      </p:sp>
+      <p:sp>
+        <p:nvSpPr>
+          <p:cNvPr id="9" name="TextBox 8"/>
           <p:cNvSpPr txBox="1"/>
           <p:nvPr/>
         </p:nvSpPr>
         <p:spPr>
           <a:xfrm>
-            <a:off x="548640" y="3268979"/>
-            <a:ext cx="3606698" cy="731520"/>
+            <a:off x="8046720" y="2560320"/>
+            <a:ext cx="3291840" cy="365760"/>
           </a:xfrm>
           <a:prstGeom prst="rect">
             <a:avLst/>
@@ -5338,61 +7943,17 @@
           <a:bodyPr wrap="square" anchor="t" lIns="0" rIns="0" tIns="0" bIns="0"/>
           <a:lstStyle/>
           <a:p>
-            <a:pPr algn="ctr"/>
-            <a:r>
-              <a:rPr sz="1700" b="1" i="0">
-                <a:solidFill>
-                  <a:srgbClr val="03306E"/>
-                </a:solidFill>
-                <a:latin typeface="Calibri"/>
-              </a:rPr>
-              <a:t>Analyse</a:t>
-            </a:r>
-          </a:p>
-        </p:txBody>
-      </p:sp>
-      <p:sp>
-        <p:nvSpPr>
-          <p:cNvPr id="9" name="Rounded Rectangle 8"/>
-          <p:cNvSpPr/>
-          <p:nvPr/>
-        </p:nvSpPr>
-        <p:spPr>
-          <a:xfrm>
-            <a:off x="548640" y="4046220"/>
-            <a:ext cx="3606698" cy="1234439"/>
-          </a:xfrm>
-          <a:prstGeom prst="roundRect">
-            <a:avLst>
-              <a:gd name="adj" fmla="val 6000"/>
-            </a:avLst>
-          </a:prstGeom>
-          <a:solidFill>
-            <a:srgbClr val="EAF3FF"/>
-          </a:solidFill>
-          <a:ln>
-            <a:noFill/>
-          </a:ln>
-          <a:effectLst/>
-        </p:spPr>
-        <p:style>
-          <a:lnRef idx="1">
-            <a:schemeClr val="accent1"/>
-          </a:lnRef>
-          <a:fillRef idx="3">
-            <a:schemeClr val="accent1"/>
-          </a:fillRef>
-          <a:effectRef idx="2">
-            <a:schemeClr val="accent1"/>
-          </a:effectRef>
-          <a:fontRef idx="minor">
-            <a:schemeClr val="lt1"/>
-          </a:fontRef>
-        </p:style>
-        <p:txBody>
-          <a:bodyPr rtlCol="0" anchor="ctr"/>
-          <a:lstStyle/>
-          <a:p/>
+            <a:pPr algn="l"/>
+            <a:r>
+              <a:rPr sz="1300" b="1" i="0">
+                <a:solidFill>
+                  <a:srgbClr val="A9C8F0"/>
+                </a:solidFill>
+                <a:latin typeface="Calibri"/>
+              </a:rPr>
+              <a:t>EXAMPLE</a:t>
+            </a:r>
+          </a:p>
         </p:txBody>
       </p:sp>
       <p:sp>
@@ -5403,8 +7964,8 @@
         </p:nvSpPr>
         <p:spPr>
           <a:xfrm>
-            <a:off x="685800" y="4183380"/>
-            <a:ext cx="3332378" cy="960119"/>
+            <a:off x="8046720" y="2971800"/>
+            <a:ext cx="3291840" cy="2971800"/>
           </a:xfrm>
           <a:prstGeom prst="rect">
             <a:avLst/>
@@ -5417,339 +7978,13 @@
           <a:p>
             <a:pPr algn="l"/>
             <a:r>
-              <a:rPr sz="1800" b="0" i="0">
-                <a:solidFill>
-                  <a:srgbClr val="202122"/>
-                </a:solidFill>
-                <a:latin typeface="Calibri"/>
-              </a:rPr>
-              <a:t>What is needed: information, services, products or transactions?</a:t>
-            </a:r>
-          </a:p>
-        </p:txBody>
-      </p:sp>
-      <p:sp>
-        <p:nvSpPr>
-          <p:cNvPr id="11" name="Oval 10"/>
-          <p:cNvSpPr/>
-          <p:nvPr/>
-        </p:nvSpPr>
-        <p:spPr>
-          <a:xfrm>
-            <a:off x="5775807" y="2491740"/>
-            <a:ext cx="640080" cy="640080"/>
-          </a:xfrm>
-          <a:prstGeom prst="ellipse">
-            <a:avLst/>
-          </a:prstGeom>
-          <a:solidFill>
-            <a:srgbClr val="4EA1FF"/>
-          </a:solidFill>
-          <a:ln>
-            <a:noFill/>
-          </a:ln>
-          <a:effectLst/>
-        </p:spPr>
-        <p:style>
-          <a:lnRef idx="1">
-            <a:schemeClr val="accent1"/>
-          </a:lnRef>
-          <a:fillRef idx="3">
-            <a:schemeClr val="accent1"/>
-          </a:fillRef>
-          <a:effectRef idx="2">
-            <a:schemeClr val="accent1"/>
-          </a:effectRef>
-          <a:fontRef idx="minor">
-            <a:schemeClr val="lt1"/>
-          </a:fontRef>
-        </p:style>
-        <p:txBody>
-          <a:bodyPr rtlCol="0" anchor="ctr" lIns="0" rIns="0" tIns="0" bIns="0"/>
-          <a:lstStyle/>
-          <a:p>
-            <a:pPr algn="ctr"/>
-            <a:r>
-              <a:rPr sz="2000" b="1">
-                <a:solidFill>
-                  <a:srgbClr val="202122"/>
-                </a:solidFill>
-                <a:latin typeface="Calibri"/>
-              </a:rPr>
-              <a:t>2</a:t>
-            </a:r>
-          </a:p>
-        </p:txBody>
-      </p:sp>
-      <p:sp>
-        <p:nvSpPr>
-          <p:cNvPr id="12" name="TextBox 11"/>
-          <p:cNvSpPr txBox="1"/>
-          <p:nvPr/>
-        </p:nvSpPr>
-        <p:spPr>
-          <a:xfrm>
-            <a:off x="4292498" y="3268979"/>
-            <a:ext cx="3606698" cy="731520"/>
-          </a:xfrm>
-          <a:prstGeom prst="rect">
-            <a:avLst/>
-          </a:prstGeom>
-          <a:noFill/>
-        </p:spPr>
-        <p:txBody>
-          <a:bodyPr wrap="square" anchor="t" lIns="0" rIns="0" tIns="0" bIns="0"/>
-          <a:lstStyle/>
-          <a:p>
-            <a:pPr algn="ctr"/>
-            <a:r>
-              <a:rPr sz="1700" b="1" i="0">
-                <a:solidFill>
-                  <a:srgbClr val="03306E"/>
-                </a:solidFill>
-                <a:latin typeface="Calibri"/>
-              </a:rPr>
-              <a:t>Identify</a:t>
-            </a:r>
-          </a:p>
-        </p:txBody>
-      </p:sp>
-      <p:sp>
-        <p:nvSpPr>
-          <p:cNvPr id="13" name="Rounded Rectangle 12"/>
-          <p:cNvSpPr/>
-          <p:nvPr/>
-        </p:nvSpPr>
-        <p:spPr>
-          <a:xfrm>
-            <a:off x="4292498" y="4046220"/>
-            <a:ext cx="3606698" cy="1234439"/>
-          </a:xfrm>
-          <a:prstGeom prst="roundRect">
-            <a:avLst>
-              <a:gd name="adj" fmla="val 6000"/>
-            </a:avLst>
-          </a:prstGeom>
-          <a:solidFill>
-            <a:srgbClr val="EAF3FF"/>
-          </a:solidFill>
-          <a:ln>
-            <a:noFill/>
-          </a:ln>
-          <a:effectLst/>
-        </p:spPr>
-        <p:style>
-          <a:lnRef idx="1">
-            <a:schemeClr val="accent1"/>
-          </a:lnRef>
-          <a:fillRef idx="3">
-            <a:schemeClr val="accent1"/>
-          </a:fillRef>
-          <a:effectRef idx="2">
-            <a:schemeClr val="accent1"/>
-          </a:effectRef>
-          <a:fontRef idx="minor">
-            <a:schemeClr val="lt1"/>
-          </a:fontRef>
-        </p:style>
-        <p:txBody>
-          <a:bodyPr rtlCol="0" anchor="ctr"/>
-          <a:lstStyle/>
-          <a:p/>
-        </p:txBody>
-      </p:sp>
-      <p:sp>
-        <p:nvSpPr>
-          <p:cNvPr id="14" name="TextBox 13"/>
-          <p:cNvSpPr txBox="1"/>
-          <p:nvPr/>
-        </p:nvSpPr>
-        <p:spPr>
-          <a:xfrm>
-            <a:off x="4429658" y="4183380"/>
-            <a:ext cx="3332378" cy="960119"/>
-          </a:xfrm>
-          <a:prstGeom prst="rect">
-            <a:avLst/>
-          </a:prstGeom>
-          <a:noFill/>
-        </p:spPr>
-        <p:txBody>
-          <a:bodyPr wrap="square" anchor="t" lIns="0" rIns="0" tIns="0" bIns="0"/>
-          <a:lstStyle/>
-          <a:p>
-            <a:pPr algn="l"/>
-            <a:r>
-              <a:rPr sz="1800" b="0" i="0">
-                <a:solidFill>
-                  <a:srgbClr val="202122"/>
-                </a:solidFill>
-                <a:latin typeface="Calibri"/>
-              </a:rPr>
-              <a:t>The best-fit solution: systems, software or wider technology.</a:t>
-            </a:r>
-          </a:p>
-        </p:txBody>
-      </p:sp>
-      <p:sp>
-        <p:nvSpPr>
-          <p:cNvPr id="15" name="Oval 14"/>
-          <p:cNvSpPr/>
-          <p:nvPr/>
-        </p:nvSpPr>
-        <p:spPr>
-          <a:xfrm>
-            <a:off x="9519666" y="2491740"/>
-            <a:ext cx="640080" cy="640080"/>
-          </a:xfrm>
-          <a:prstGeom prst="ellipse">
-            <a:avLst/>
-          </a:prstGeom>
-          <a:solidFill>
-            <a:srgbClr val="4EA1FF"/>
-          </a:solidFill>
-          <a:ln>
-            <a:noFill/>
-          </a:ln>
-          <a:effectLst/>
-        </p:spPr>
-        <p:style>
-          <a:lnRef idx="1">
-            <a:schemeClr val="accent1"/>
-          </a:lnRef>
-          <a:fillRef idx="3">
-            <a:schemeClr val="accent1"/>
-          </a:fillRef>
-          <a:effectRef idx="2">
-            <a:schemeClr val="accent1"/>
-          </a:effectRef>
-          <a:fontRef idx="minor">
-            <a:schemeClr val="lt1"/>
-          </a:fontRef>
-        </p:style>
-        <p:txBody>
-          <a:bodyPr rtlCol="0" anchor="ctr" lIns="0" rIns="0" tIns="0" bIns="0"/>
-          <a:lstStyle/>
-          <a:p>
-            <a:pPr algn="ctr"/>
-            <a:r>
-              <a:rPr sz="2000" b="1">
-                <a:solidFill>
-                  <a:srgbClr val="202122"/>
-                </a:solidFill>
-                <a:latin typeface="Calibri"/>
-              </a:rPr>
-              <a:t>3</a:t>
-            </a:r>
-          </a:p>
-        </p:txBody>
-      </p:sp>
-      <p:sp>
-        <p:nvSpPr>
-          <p:cNvPr id="16" name="TextBox 15"/>
-          <p:cNvSpPr txBox="1"/>
-          <p:nvPr/>
-        </p:nvSpPr>
-        <p:spPr>
-          <a:xfrm>
-            <a:off x="8036356" y="3268979"/>
-            <a:ext cx="3606698" cy="731520"/>
-          </a:xfrm>
-          <a:prstGeom prst="rect">
-            <a:avLst/>
-          </a:prstGeom>
-          <a:noFill/>
-        </p:spPr>
-        <p:txBody>
-          <a:bodyPr wrap="square" anchor="t" lIns="0" rIns="0" tIns="0" bIns="0"/>
-          <a:lstStyle/>
-          <a:p>
-            <a:pPr algn="ctr"/>
-            <a:r>
-              <a:rPr sz="1700" b="1" i="0">
-                <a:solidFill>
-                  <a:srgbClr val="03306E"/>
-                </a:solidFill>
-                <a:latin typeface="Calibri"/>
-              </a:rPr>
-              <a:t>Explain</a:t>
-            </a:r>
-          </a:p>
-        </p:txBody>
-      </p:sp>
-      <p:sp>
-        <p:nvSpPr>
-          <p:cNvPr id="17" name="Rounded Rectangle 16"/>
-          <p:cNvSpPr/>
-          <p:nvPr/>
-        </p:nvSpPr>
-        <p:spPr>
-          <a:xfrm>
-            <a:off x="8036356" y="4046220"/>
-            <a:ext cx="3606698" cy="1234439"/>
-          </a:xfrm>
-          <a:prstGeom prst="roundRect">
-            <a:avLst>
-              <a:gd name="adj" fmla="val 6000"/>
-            </a:avLst>
-          </a:prstGeom>
-          <a:solidFill>
-            <a:srgbClr val="EAF3FF"/>
-          </a:solidFill>
-          <a:ln>
-            <a:noFill/>
-          </a:ln>
-          <a:effectLst/>
-        </p:spPr>
-        <p:style>
-          <a:lnRef idx="1">
-            <a:schemeClr val="accent1"/>
-          </a:lnRef>
-          <a:fillRef idx="3">
-            <a:schemeClr val="accent1"/>
-          </a:fillRef>
-          <a:effectRef idx="2">
-            <a:schemeClr val="accent1"/>
-          </a:effectRef>
-          <a:fontRef idx="minor">
-            <a:schemeClr val="lt1"/>
-          </a:fontRef>
-        </p:style>
-        <p:txBody>
-          <a:bodyPr rtlCol="0" anchor="ctr"/>
-          <a:lstStyle/>
-          <a:p/>
-        </p:txBody>
-      </p:sp>
-      <p:sp>
-        <p:nvSpPr>
-          <p:cNvPr id="18" name="TextBox 17"/>
-          <p:cNvSpPr txBox="1"/>
-          <p:nvPr/>
-        </p:nvSpPr>
-        <p:spPr>
-          <a:xfrm>
-            <a:off x="8173516" y="4183380"/>
-            <a:ext cx="3332378" cy="960119"/>
-          </a:xfrm>
-          <a:prstGeom prst="rect">
-            <a:avLst/>
-          </a:prstGeom>
-          <a:noFill/>
-        </p:spPr>
-        <p:txBody>
-          <a:bodyPr wrap="square" anchor="t" lIns="0" rIns="0" tIns="0" bIns="0"/>
-          <a:lstStyle/>
-          <a:p>
-            <a:pPr algn="l"/>
-            <a:r>
-              <a:rPr sz="1800" b="0" i="0">
-                <a:solidFill>
-                  <a:srgbClr val="202122"/>
-                </a:solidFill>
-                <a:latin typeface="Calibri"/>
-              </a:rPr>
-              <a:t>The benefit, clearly and concisely, pitched to the audience.</a:t>
+              <a:rPr sz="1900" b="0" i="0">
+                <a:solidFill>
+                  <a:srgbClr val="FFFFFF"/>
+                </a:solidFill>
+                <a:latin typeface="Cambria"/>
+              </a:rPr>
+              <a:t>Not 'SharePoint provides versioned document libraries', but 'everyone edits the same up-to-date file, and you can always get an older version back'.</a:t>
             </a:r>
           </a:p>
         </p:txBody>
@@ -5841,7 +8076,7 @@
                 </a:solidFill>
                 <a:latin typeface="Cambria"/>
               </a:rPr>
-              <a:t>Training users</a:t>
+              <a:t>Explaining a digital solution</a:t>
             </a:r>
           </a:p>
         </p:txBody>
@@ -5914,22 +8149,20 @@
       </p:sp>
       <p:sp>
         <p:nvSpPr>
-          <p:cNvPr id="6" name="Rounded Rectangle 5"/>
+          <p:cNvPr id="6" name="Rectangle 5"/>
           <p:cNvSpPr/>
           <p:nvPr/>
         </p:nvSpPr>
         <p:spPr>
           <a:xfrm>
-            <a:off x="548640" y="1600200"/>
-            <a:ext cx="5364327" cy="640080"/>
-          </a:xfrm>
-          <a:prstGeom prst="roundRect">
-            <a:avLst>
-              <a:gd name="adj" fmla="val 15000"/>
-            </a:avLst>
+            <a:off x="2351989" y="2793492"/>
+            <a:ext cx="7487716" cy="36576"/>
+          </a:xfrm>
+          <a:prstGeom prst="rect">
+            <a:avLst/>
           </a:prstGeom>
           <a:solidFill>
-            <a:srgbClr val="03306E"/>
+            <a:srgbClr val="A9C8F0"/>
           </a:solidFill>
           <a:ln>
             <a:noFill/>
@@ -5958,14 +8191,67 @@
       </p:sp>
       <p:sp>
         <p:nvSpPr>
-          <p:cNvPr id="7" name="TextBox 6"/>
+          <p:cNvPr id="7" name="Oval 6"/>
+          <p:cNvSpPr/>
+          <p:nvPr/>
+        </p:nvSpPr>
+        <p:spPr>
+          <a:xfrm>
+            <a:off x="2031949" y="2491740"/>
+            <a:ext cx="640080" cy="640080"/>
+          </a:xfrm>
+          <a:prstGeom prst="ellipse">
+            <a:avLst/>
+          </a:prstGeom>
+          <a:solidFill>
+            <a:srgbClr val="4EA1FF"/>
+          </a:solidFill>
+          <a:ln>
+            <a:noFill/>
+          </a:ln>
+          <a:effectLst/>
+        </p:spPr>
+        <p:style>
+          <a:lnRef idx="1">
+            <a:schemeClr val="accent1"/>
+          </a:lnRef>
+          <a:fillRef idx="3">
+            <a:schemeClr val="accent1"/>
+          </a:fillRef>
+          <a:effectRef idx="2">
+            <a:schemeClr val="accent1"/>
+          </a:effectRef>
+          <a:fontRef idx="minor">
+            <a:schemeClr val="lt1"/>
+          </a:fontRef>
+        </p:style>
+        <p:txBody>
+          <a:bodyPr rtlCol="0" anchor="ctr" lIns="0" rIns="0" tIns="0" bIns="0"/>
+          <a:lstStyle/>
+          <a:p>
+            <a:pPr algn="ctr"/>
+            <a:r>
+              <a:rPr sz="2000" b="1">
+                <a:solidFill>
+                  <a:srgbClr val="202122"/>
+                </a:solidFill>
+                <a:latin typeface="Calibri"/>
+              </a:rPr>
+              <a:t>1</a:t>
+            </a:r>
+          </a:p>
+        </p:txBody>
+      </p:sp>
+      <p:sp>
+        <p:nvSpPr>
+          <p:cNvPr id="8" name="TextBox 7"/>
           <p:cNvSpPr txBox="1"/>
           <p:nvPr/>
         </p:nvSpPr>
         <p:spPr>
           <a:xfrm>
-            <a:off x="777240" y="1600200"/>
-            <a:ext cx="4907127" cy="640080"/>
+            <a:off x="548640" y="3268979"/>
+            <a:ext cx="3606698" cy="731520"/>
           </a:xfrm>
           <a:prstGeom prst="rect">
             <a:avLst/>
@@ -5973,36 +8259,36 @@
           <a:noFill/>
         </p:spPr>
         <p:txBody>
-          <a:bodyPr wrap="square" anchor="ctr" lIns="0" rIns="0" tIns="0" bIns="0"/>
-          <a:lstStyle/>
-          <a:p>
-            <a:pPr algn="l"/>
-            <a:r>
-              <a:rPr sz="2000" b="1" i="0">
-                <a:solidFill>
-                  <a:srgbClr val="FFFFFF"/>
-                </a:solidFill>
-                <a:latin typeface="Calibri"/>
-              </a:rPr>
-              <a:t>Methods</a:t>
-            </a:r>
-          </a:p>
-        </p:txBody>
-      </p:sp>
-      <p:sp>
-        <p:nvSpPr>
-          <p:cNvPr id="8" name="Rounded Rectangle 7"/>
+          <a:bodyPr wrap="square" anchor="t" lIns="0" rIns="0" tIns="0" bIns="0"/>
+          <a:lstStyle/>
+          <a:p>
+            <a:pPr algn="ctr"/>
+            <a:r>
+              <a:rPr sz="1700" b="1" i="0">
+                <a:solidFill>
+                  <a:srgbClr val="03306E"/>
+                </a:solidFill>
+                <a:latin typeface="Calibri"/>
+              </a:rPr>
+              <a:t>Analyse</a:t>
+            </a:r>
+          </a:p>
+        </p:txBody>
+      </p:sp>
+      <p:sp>
+        <p:nvSpPr>
+          <p:cNvPr id="9" name="Rounded Rectangle 8"/>
           <p:cNvSpPr/>
           <p:nvPr/>
         </p:nvSpPr>
         <p:spPr>
           <a:xfrm>
-            <a:off x="548640" y="2377440"/>
-            <a:ext cx="5364327" cy="3794760"/>
+            <a:off x="548640" y="4046220"/>
+            <a:ext cx="3606698" cy="1234439"/>
           </a:xfrm>
           <a:prstGeom prst="roundRect">
             <a:avLst>
-              <a:gd name="adj" fmla="val 4000"/>
+              <a:gd name="adj" fmla="val 6000"/>
             </a:avLst>
           </a:prstGeom>
           <a:solidFill>
@@ -6035,14 +8321,14 @@
       </p:sp>
       <p:sp>
         <p:nvSpPr>
-          <p:cNvPr id="9" name="TextBox 8"/>
+          <p:cNvPr id="10" name="TextBox 9"/>
           <p:cNvSpPr txBox="1"/>
           <p:nvPr/>
         </p:nvSpPr>
         <p:spPr>
           <a:xfrm>
-            <a:off x="822959" y="2606040"/>
-            <a:ext cx="4815687" cy="3337560"/>
+            <a:off x="685800" y="4183380"/>
+            <a:ext cx="3332378" cy="960119"/>
           </a:xfrm>
           <a:prstGeom prst="rect">
             <a:avLst/>
@@ -6050,135 +8336,38 @@
           <a:noFill/>
         </p:spPr>
         <p:txBody>
-          <a:bodyPr wrap="square" lIns="0" rIns="0" tIns="0" bIns="0">
-            <a:spAutoFit/>
-          </a:bodyPr>
-          <a:lstStyle/>
-          <a:p>
-            <a:pPr marL="274320" indent="-274320">
-              <a:spcAft>
-                <a:spcPts val="990"/>
-              </a:spcAft>
-              <a:buClr>
-                <a:srgbClr val="0645AD"/>
-              </a:buClr>
-              <a:buFont typeface="Arial"/>
-              <a:buChar char="•"/>
-            </a:pPr>
-            <a:r>
-              <a:rPr sz="2200" b="0">
+          <a:bodyPr wrap="square" anchor="t" lIns="0" rIns="0" tIns="0" bIns="0"/>
+          <a:lstStyle/>
+          <a:p>
+            <a:pPr algn="l"/>
+            <a:r>
+              <a:rPr sz="1800" b="0" i="0">
                 <a:solidFill>
                   <a:srgbClr val="202122"/>
                 </a:solidFill>
                 <a:latin typeface="Calibri"/>
               </a:rPr>
-              <a:t>Shadowing and desk-side support</a:t>
-            </a:r>
-          </a:p>
-          <a:p>
-            <a:pPr marL="274320" indent="-274320">
-              <a:spcAft>
-                <a:spcPts val="990"/>
-              </a:spcAft>
-              <a:buClr>
-                <a:srgbClr val="0645AD"/>
-              </a:buClr>
-              <a:buFont typeface="Arial"/>
-              <a:buChar char="•"/>
-            </a:pPr>
-            <a:r>
-              <a:rPr sz="2200" b="0">
-                <a:solidFill>
-                  <a:srgbClr val="202122"/>
-                </a:solidFill>
-                <a:latin typeface="Calibri"/>
-              </a:rPr>
-              <a:t>Remote support</a:t>
-            </a:r>
-          </a:p>
-          <a:p>
-            <a:pPr marL="274320" indent="-274320">
-              <a:spcAft>
-                <a:spcPts val="990"/>
-              </a:spcAft>
-              <a:buClr>
-                <a:srgbClr val="0645AD"/>
-              </a:buClr>
-              <a:buFont typeface="Arial"/>
-              <a:buChar char="•"/>
-            </a:pPr>
-            <a:r>
-              <a:rPr sz="2200" b="0">
-                <a:solidFill>
-                  <a:srgbClr val="202122"/>
-                </a:solidFill>
-                <a:latin typeface="Calibri"/>
-              </a:rPr>
-              <a:t>E-learning and simulation</a:t>
-            </a:r>
-          </a:p>
-          <a:p>
-            <a:pPr marL="274320" indent="-274320">
-              <a:spcAft>
-                <a:spcPts val="990"/>
-              </a:spcAft>
-              <a:buClr>
-                <a:srgbClr val="0645AD"/>
-              </a:buClr>
-              <a:buFont typeface="Arial"/>
-              <a:buChar char="•"/>
-            </a:pPr>
-            <a:r>
-              <a:rPr sz="2200" b="0">
-                <a:solidFill>
-                  <a:srgbClr val="202122"/>
-                </a:solidFill>
-                <a:latin typeface="Calibri"/>
-              </a:rPr>
-              <a:t>VR, AR and smart boards</a:t>
-            </a:r>
-          </a:p>
-          <a:p>
-            <a:pPr marL="274320" indent="-274320">
-              <a:spcAft>
-                <a:spcPts val="990"/>
-              </a:spcAft>
-              <a:buClr>
-                <a:srgbClr val="0645AD"/>
-              </a:buClr>
-              <a:buFont typeface="Arial"/>
-              <a:buChar char="•"/>
-            </a:pPr>
-            <a:r>
-              <a:rPr sz="2200" b="0">
-                <a:solidFill>
-                  <a:srgbClr val="202122"/>
-                </a:solidFill>
-                <a:latin typeface="Calibri"/>
-              </a:rPr>
-              <a:t>Gamified apps, e.g. Kahoot!, Padlet</a:t>
-            </a:r>
-          </a:p>
-        </p:txBody>
-      </p:sp>
-      <p:sp>
-        <p:nvSpPr>
-          <p:cNvPr id="10" name="Rounded Rectangle 9"/>
+              <a:t>What is needed: information, services, products or transactions?</a:t>
+            </a:r>
+          </a:p>
+        </p:txBody>
+      </p:sp>
+      <p:sp>
+        <p:nvSpPr>
+          <p:cNvPr id="11" name="Oval 10"/>
           <p:cNvSpPr/>
           <p:nvPr/>
         </p:nvSpPr>
         <p:spPr>
           <a:xfrm>
-            <a:off x="6278727" y="1600200"/>
-            <a:ext cx="5364327" cy="640080"/>
-          </a:xfrm>
-          <a:prstGeom prst="roundRect">
-            <a:avLst>
-              <a:gd name="adj" fmla="val 15000"/>
-            </a:avLst>
+            <a:off x="5775807" y="2491740"/>
+            <a:ext cx="640080" cy="640080"/>
+          </a:xfrm>
+          <a:prstGeom prst="ellipse">
+            <a:avLst/>
           </a:prstGeom>
           <a:solidFill>
-            <a:srgbClr val="0645AD"/>
+            <a:srgbClr val="4EA1FF"/>
           </a:solidFill>
           <a:ln>
             <a:noFill/>
@@ -6200,21 +8389,32 @@
           </a:fontRef>
         </p:style>
         <p:txBody>
-          <a:bodyPr rtlCol="0" anchor="ctr"/>
-          <a:lstStyle/>
-          <a:p/>
-        </p:txBody>
-      </p:sp>
-      <p:sp>
-        <p:nvSpPr>
-          <p:cNvPr id="11" name="TextBox 10"/>
+          <a:bodyPr rtlCol="0" anchor="ctr" lIns="0" rIns="0" tIns="0" bIns="0"/>
+          <a:lstStyle/>
+          <a:p>
+            <a:pPr algn="ctr"/>
+            <a:r>
+              <a:rPr sz="2000" b="1">
+                <a:solidFill>
+                  <a:srgbClr val="202122"/>
+                </a:solidFill>
+                <a:latin typeface="Calibri"/>
+              </a:rPr>
+              <a:t>2</a:t>
+            </a:r>
+          </a:p>
+        </p:txBody>
+      </p:sp>
+      <p:sp>
+        <p:nvSpPr>
+          <p:cNvPr id="12" name="TextBox 11"/>
           <p:cNvSpPr txBox="1"/>
           <p:nvPr/>
         </p:nvSpPr>
         <p:spPr>
           <a:xfrm>
-            <a:off x="6507327" y="1600200"/>
-            <a:ext cx="4907127" cy="640080"/>
+            <a:off x="4292498" y="3268979"/>
+            <a:ext cx="3606698" cy="731520"/>
           </a:xfrm>
           <a:prstGeom prst="rect">
             <a:avLst/>
@@ -6222,36 +8422,36 @@
           <a:noFill/>
         </p:spPr>
         <p:txBody>
-          <a:bodyPr wrap="square" anchor="ctr" lIns="0" rIns="0" tIns="0" bIns="0"/>
-          <a:lstStyle/>
-          <a:p>
-            <a:pPr algn="l"/>
-            <a:r>
-              <a:rPr sz="2000" b="1" i="0">
-                <a:solidFill>
-                  <a:srgbClr val="FFFFFF"/>
-                </a:solidFill>
-                <a:latin typeface="Calibri"/>
-              </a:rPr>
-              <a:t>Tools</a:t>
-            </a:r>
-          </a:p>
-        </p:txBody>
-      </p:sp>
-      <p:sp>
-        <p:nvSpPr>
-          <p:cNvPr id="12" name="Rounded Rectangle 11"/>
+          <a:bodyPr wrap="square" anchor="t" lIns="0" rIns="0" tIns="0" bIns="0"/>
+          <a:lstStyle/>
+          <a:p>
+            <a:pPr algn="ctr"/>
+            <a:r>
+              <a:rPr sz="1700" b="1" i="0">
+                <a:solidFill>
+                  <a:srgbClr val="03306E"/>
+                </a:solidFill>
+                <a:latin typeface="Calibri"/>
+              </a:rPr>
+              <a:t>Identify</a:t>
+            </a:r>
+          </a:p>
+        </p:txBody>
+      </p:sp>
+      <p:sp>
+        <p:nvSpPr>
+          <p:cNvPr id="13" name="Rounded Rectangle 12"/>
           <p:cNvSpPr/>
           <p:nvPr/>
         </p:nvSpPr>
         <p:spPr>
           <a:xfrm>
-            <a:off x="6278727" y="2377440"/>
-            <a:ext cx="5364327" cy="3794760"/>
+            <a:off x="4292498" y="4046220"/>
+            <a:ext cx="3606698" cy="1234439"/>
           </a:xfrm>
           <a:prstGeom prst="roundRect">
             <a:avLst>
-              <a:gd name="adj" fmla="val 4000"/>
+              <a:gd name="adj" fmla="val 6000"/>
             </a:avLst>
           </a:prstGeom>
           <a:solidFill>
@@ -6284,14 +8484,14 @@
       </p:sp>
       <p:sp>
         <p:nvSpPr>
-          <p:cNvPr id="13" name="TextBox 12"/>
+          <p:cNvPr id="14" name="TextBox 13"/>
           <p:cNvSpPr txBox="1"/>
           <p:nvPr/>
         </p:nvSpPr>
         <p:spPr>
           <a:xfrm>
-            <a:off x="6553047" y="2606040"/>
-            <a:ext cx="4815687" cy="3337560"/>
+            <a:off x="4429658" y="4183380"/>
+            <a:ext cx="3332378" cy="960119"/>
           </a:xfrm>
           <a:prstGeom prst="rect">
             <a:avLst/>
@@ -6299,113 +8499,181 @@
           <a:noFill/>
         </p:spPr>
         <p:txBody>
-          <a:bodyPr wrap="square" lIns="0" rIns="0" tIns="0" bIns="0">
-            <a:spAutoFit/>
-          </a:bodyPr>
-          <a:lstStyle/>
-          <a:p>
-            <a:pPr marL="274320" indent="-274320">
-              <a:spcAft>
-                <a:spcPts val="990"/>
-              </a:spcAft>
-              <a:buClr>
-                <a:srgbClr val="0645AD"/>
-              </a:buClr>
-              <a:buFont typeface="Arial"/>
-              <a:buChar char="•"/>
-            </a:pPr>
-            <a:r>
-              <a:rPr sz="2200" b="0">
+          <a:bodyPr wrap="square" anchor="t" lIns="0" rIns="0" tIns="0" bIns="0"/>
+          <a:lstStyle/>
+          <a:p>
+            <a:pPr algn="l"/>
+            <a:r>
+              <a:rPr sz="1800" b="0" i="0">
                 <a:solidFill>
                   <a:srgbClr val="202122"/>
                 </a:solidFill>
                 <a:latin typeface="Calibri"/>
               </a:rPr>
-              <a:t>Crib sheets and smart sheets</a:t>
-            </a:r>
-          </a:p>
-          <a:p>
-            <a:pPr marL="274320" indent="-274320">
-              <a:spcAft>
-                <a:spcPts val="990"/>
-              </a:spcAft>
-              <a:buClr>
-                <a:srgbClr val="0645AD"/>
-              </a:buClr>
-              <a:buFont typeface="Arial"/>
-              <a:buChar char="•"/>
-            </a:pPr>
-            <a:r>
-              <a:rPr sz="2200" b="0">
+              <a:t>The best-fit solution: systems, software or wider technology.</a:t>
+            </a:r>
+          </a:p>
+        </p:txBody>
+      </p:sp>
+      <p:sp>
+        <p:nvSpPr>
+          <p:cNvPr id="15" name="Oval 14"/>
+          <p:cNvSpPr/>
+          <p:nvPr/>
+        </p:nvSpPr>
+        <p:spPr>
+          <a:xfrm>
+            <a:off x="9519666" y="2491740"/>
+            <a:ext cx="640080" cy="640080"/>
+          </a:xfrm>
+          <a:prstGeom prst="ellipse">
+            <a:avLst/>
+          </a:prstGeom>
+          <a:solidFill>
+            <a:srgbClr val="4EA1FF"/>
+          </a:solidFill>
+          <a:ln>
+            <a:noFill/>
+          </a:ln>
+          <a:effectLst/>
+        </p:spPr>
+        <p:style>
+          <a:lnRef idx="1">
+            <a:schemeClr val="accent1"/>
+          </a:lnRef>
+          <a:fillRef idx="3">
+            <a:schemeClr val="accent1"/>
+          </a:fillRef>
+          <a:effectRef idx="2">
+            <a:schemeClr val="accent1"/>
+          </a:effectRef>
+          <a:fontRef idx="minor">
+            <a:schemeClr val="lt1"/>
+          </a:fontRef>
+        </p:style>
+        <p:txBody>
+          <a:bodyPr rtlCol="0" anchor="ctr" lIns="0" rIns="0" tIns="0" bIns="0"/>
+          <a:lstStyle/>
+          <a:p>
+            <a:pPr algn="ctr"/>
+            <a:r>
+              <a:rPr sz="2000" b="1">
                 <a:solidFill>
                   <a:srgbClr val="202122"/>
                 </a:solidFill>
                 <a:latin typeface="Calibri"/>
               </a:rPr>
-              <a:t>Webinars and screencasts</a:t>
-            </a:r>
-          </a:p>
-          <a:p>
-            <a:pPr marL="274320" indent="-274320">
-              <a:spcAft>
-                <a:spcPts val="990"/>
-              </a:spcAft>
-              <a:buClr>
-                <a:srgbClr val="0645AD"/>
-              </a:buClr>
-              <a:buFont typeface="Arial"/>
-              <a:buChar char="•"/>
-            </a:pPr>
-            <a:r>
-              <a:rPr sz="2200" b="0">
+              <a:t>3</a:t>
+            </a:r>
+          </a:p>
+        </p:txBody>
+      </p:sp>
+      <p:sp>
+        <p:nvSpPr>
+          <p:cNvPr id="16" name="TextBox 15"/>
+          <p:cNvSpPr txBox="1"/>
+          <p:nvPr/>
+        </p:nvSpPr>
+        <p:spPr>
+          <a:xfrm>
+            <a:off x="8036356" y="3268979"/>
+            <a:ext cx="3606698" cy="731520"/>
+          </a:xfrm>
+          <a:prstGeom prst="rect">
+            <a:avLst/>
+          </a:prstGeom>
+          <a:noFill/>
+        </p:spPr>
+        <p:txBody>
+          <a:bodyPr wrap="square" anchor="t" lIns="0" rIns="0" tIns="0" bIns="0"/>
+          <a:lstStyle/>
+          <a:p>
+            <a:pPr algn="ctr"/>
+            <a:r>
+              <a:rPr sz="1700" b="1" i="0">
+                <a:solidFill>
+                  <a:srgbClr val="03306E"/>
+                </a:solidFill>
+                <a:latin typeface="Calibri"/>
+              </a:rPr>
+              <a:t>Explain</a:t>
+            </a:r>
+          </a:p>
+        </p:txBody>
+      </p:sp>
+      <p:sp>
+        <p:nvSpPr>
+          <p:cNvPr id="17" name="Rounded Rectangle 16"/>
+          <p:cNvSpPr/>
+          <p:nvPr/>
+        </p:nvSpPr>
+        <p:spPr>
+          <a:xfrm>
+            <a:off x="8036356" y="4046220"/>
+            <a:ext cx="3606698" cy="1234439"/>
+          </a:xfrm>
+          <a:prstGeom prst="roundRect">
+            <a:avLst>
+              <a:gd name="adj" fmla="val 6000"/>
+            </a:avLst>
+          </a:prstGeom>
+          <a:solidFill>
+            <a:srgbClr val="EAF3FF"/>
+          </a:solidFill>
+          <a:ln>
+            <a:noFill/>
+          </a:ln>
+          <a:effectLst/>
+        </p:spPr>
+        <p:style>
+          <a:lnRef idx="1">
+            <a:schemeClr val="accent1"/>
+          </a:lnRef>
+          <a:fillRef idx="3">
+            <a:schemeClr val="accent1"/>
+          </a:fillRef>
+          <a:effectRef idx="2">
+            <a:schemeClr val="accent1"/>
+          </a:effectRef>
+          <a:fontRef idx="minor">
+            <a:schemeClr val="lt1"/>
+          </a:fontRef>
+        </p:style>
+        <p:txBody>
+          <a:bodyPr rtlCol="0" anchor="ctr"/>
+          <a:lstStyle/>
+          <a:p/>
+        </p:txBody>
+      </p:sp>
+      <p:sp>
+        <p:nvSpPr>
+          <p:cNvPr id="18" name="TextBox 17"/>
+          <p:cNvSpPr txBox="1"/>
+          <p:nvPr/>
+        </p:nvSpPr>
+        <p:spPr>
+          <a:xfrm>
+            <a:off x="8173516" y="4183380"/>
+            <a:ext cx="3332378" cy="960119"/>
+          </a:xfrm>
+          <a:prstGeom prst="rect">
+            <a:avLst/>
+          </a:prstGeom>
+          <a:noFill/>
+        </p:spPr>
+        <p:txBody>
+          <a:bodyPr wrap="square" anchor="t" lIns="0" rIns="0" tIns="0" bIns="0"/>
+          <a:lstStyle/>
+          <a:p>
+            <a:pPr algn="l"/>
+            <a:r>
+              <a:rPr sz="1800" b="0" i="0">
                 <a:solidFill>
                   <a:srgbClr val="202122"/>
                 </a:solidFill>
                 <a:latin typeface="Calibri"/>
               </a:rPr>
-              <a:t>VLEs and MLEs</a:t>
-            </a:r>
-          </a:p>
-          <a:p>
-            <a:pPr marL="274320" indent="-274320">
-              <a:spcAft>
-                <a:spcPts val="990"/>
-              </a:spcAft>
-              <a:buClr>
-                <a:srgbClr val="0645AD"/>
-              </a:buClr>
-              <a:buFont typeface="Arial"/>
-              <a:buChar char="•"/>
-            </a:pPr>
-            <a:r>
-              <a:rPr sz="2200" b="0">
-                <a:solidFill>
-                  <a:srgbClr val="202122"/>
-                </a:solidFill>
-                <a:latin typeface="Calibri"/>
-              </a:rPr>
-              <a:t>Sandboxed practice environments</a:t>
-            </a:r>
-          </a:p>
-          <a:p>
-            <a:pPr marL="274320" indent="-274320">
-              <a:spcAft>
-                <a:spcPts val="990"/>
-              </a:spcAft>
-              <a:buClr>
-                <a:srgbClr val="0645AD"/>
-              </a:buClr>
-              <a:buFont typeface="Arial"/>
-              <a:buChar char="•"/>
-            </a:pPr>
-            <a:r>
-              <a:rPr sz="2200" b="0">
-                <a:solidFill>
-                  <a:srgbClr val="202122"/>
-                </a:solidFill>
-                <a:latin typeface="Calibri"/>
-              </a:rPr>
-              <a:t>MOOCs</a:t>
+              <a:t>The benefit, clearly and concisely, pitched to the audience.</a:t>
             </a:r>
           </a:p>
         </p:txBody>
@@ -6497,7 +8765,7 @@
                 </a:solidFill>
                 <a:latin typeface="Cambria"/>
               </a:rPr>
-              <a:t>Check your understanding</a:t>
+              <a:t>Quick check: Explaining a digital solution</a:t>
             </a:r>
           </a:p>
         </p:txBody>
@@ -6576,8 +8844,8 @@
         </p:nvSpPr>
         <p:spPr>
           <a:xfrm>
-            <a:off x="548640" y="1618488"/>
-            <a:ext cx="411480" cy="411480"/>
+            <a:off x="548640" y="1691640"/>
+            <a:ext cx="502920" cy="502920"/>
           </a:xfrm>
           <a:prstGeom prst="ellipse">
             <a:avLst/>
@@ -6610,7 +8878,7 @@
           <a:p>
             <a:pPr algn="ctr"/>
             <a:r>
-              <a:rPr sz="1400" b="1">
+              <a:rPr sz="1600" b="1">
                 <a:solidFill>
                   <a:srgbClr val="202122"/>
                 </a:solidFill>
@@ -6629,8 +8897,8 @@
         </p:nvSpPr>
         <p:spPr>
           <a:xfrm>
-            <a:off x="1234440" y="1600200"/>
-            <a:ext cx="10408615" cy="1030986"/>
+            <a:off x="1371600" y="1645920"/>
+            <a:ext cx="10271455" cy="1188720"/>
           </a:xfrm>
           <a:prstGeom prst="rect">
             <a:avLst/>
@@ -6643,13 +8911,13 @@
           <a:p>
             <a:pPr algn="l"/>
             <a:r>
-              <a:rPr sz="2200" b="0" i="0">
+              <a:rPr sz="2400" b="0" i="0">
                 <a:solidFill>
                   <a:srgbClr val="202122"/>
                 </a:solidFill>
                 <a:latin typeface="Calibri"/>
               </a:rPr>
-              <a:t>Give a digital technology used in HR.</a:t>
+              <a:t>What should you analyse first?</a:t>
             </a:r>
           </a:p>
         </p:txBody>
@@ -6662,8 +8930,8 @@
         </p:nvSpPr>
         <p:spPr>
           <a:xfrm>
-            <a:off x="548640" y="2814066"/>
-            <a:ext cx="411480" cy="411480"/>
+            <a:off x="548640" y="3108960"/>
+            <a:ext cx="502920" cy="502920"/>
           </a:xfrm>
           <a:prstGeom prst="ellipse">
             <a:avLst/>
@@ -6696,7 +8964,7 @@
           <a:p>
             <a:pPr algn="ctr"/>
             <a:r>
-              <a:rPr sz="1400" b="1">
+              <a:rPr sz="1600" b="1">
                 <a:solidFill>
                   <a:srgbClr val="202122"/>
                 </a:solidFill>
@@ -6715,8 +8983,8 @@
         </p:nvSpPr>
         <p:spPr>
           <a:xfrm>
-            <a:off x="1234440" y="2795778"/>
-            <a:ext cx="10408615" cy="1030986"/>
+            <a:off x="1371600" y="3063240"/>
+            <a:ext cx="10271455" cy="1188720"/>
           </a:xfrm>
           <a:prstGeom prst="rect">
             <a:avLst/>
@@ -6729,13 +8997,13 @@
           <a:p>
             <a:pPr algn="l"/>
             <a:r>
-              <a:rPr sz="2200" b="0" i="0">
+              <a:rPr sz="2400" b="0" i="0">
                 <a:solidFill>
                   <a:srgbClr val="202122"/>
                 </a:solidFill>
                 <a:latin typeface="Calibri"/>
               </a:rPr>
-              <a:t>What is a crib sheet?</a:t>
+              <a:t>Why focus on benefits rather than features?</a:t>
             </a:r>
           </a:p>
         </p:txBody>
@@ -6748,8 +9016,8 @@
         </p:nvSpPr>
         <p:spPr>
           <a:xfrm>
-            <a:off x="548640" y="4009644"/>
-            <a:ext cx="411480" cy="411480"/>
+            <a:off x="548640" y="4526280"/>
+            <a:ext cx="502920" cy="502920"/>
           </a:xfrm>
           <a:prstGeom prst="ellipse">
             <a:avLst/>
@@ -6782,7 +9050,7 @@
           <a:p>
             <a:pPr algn="ctr"/>
             <a:r>
-              <a:rPr sz="1400" b="1">
+              <a:rPr sz="1600" b="1">
                 <a:solidFill>
                   <a:srgbClr val="202122"/>
                 </a:solidFill>
@@ -6801,8 +9069,8 @@
         </p:nvSpPr>
         <p:spPr>
           <a:xfrm>
-            <a:off x="1234440" y="3991356"/>
-            <a:ext cx="10408615" cy="1030986"/>
+            <a:off x="1371600" y="4480560"/>
+            <a:ext cx="10271455" cy="1188720"/>
           </a:xfrm>
           <a:prstGeom prst="rect">
             <a:avLst/>
@@ -6815,80 +9083,27 @@
           <a:p>
             <a:pPr algn="l"/>
             <a:r>
-              <a:rPr sz="2200" b="0" i="0">
+              <a:rPr sz="2400" b="0" i="0">
                 <a:solidFill>
                   <a:srgbClr val="202122"/>
                 </a:solidFill>
                 <a:latin typeface="Calibri"/>
               </a:rPr>
-              <a:t>Why use a sandboxed environment for training?</a:t>
-            </a:r>
-          </a:p>
-        </p:txBody>
-      </p:sp>
-      <p:sp>
-        <p:nvSpPr>
-          <p:cNvPr id="12" name="Oval 11"/>
-          <p:cNvSpPr/>
-          <p:nvPr/>
-        </p:nvSpPr>
-        <p:spPr>
-          <a:xfrm>
-            <a:off x="548640" y="5205221"/>
-            <a:ext cx="411480" cy="411480"/>
-          </a:xfrm>
-          <a:prstGeom prst="ellipse">
-            <a:avLst/>
-          </a:prstGeom>
-          <a:solidFill>
-            <a:srgbClr val="4EA1FF"/>
-          </a:solidFill>
-          <a:ln>
-            <a:noFill/>
-          </a:ln>
-          <a:effectLst/>
-        </p:spPr>
-        <p:style>
-          <a:lnRef idx="1">
-            <a:schemeClr val="accent1"/>
-          </a:lnRef>
-          <a:fillRef idx="3">
-            <a:schemeClr val="accent1"/>
-          </a:fillRef>
-          <a:effectRef idx="2">
-            <a:schemeClr val="accent1"/>
-          </a:effectRef>
-          <a:fontRef idx="minor">
-            <a:schemeClr val="lt1"/>
-          </a:fontRef>
-        </p:style>
-        <p:txBody>
-          <a:bodyPr rtlCol="0" anchor="ctr" lIns="0" rIns="0" tIns="0" bIns="0"/>
-          <a:lstStyle/>
-          <a:p>
-            <a:pPr algn="ctr"/>
-            <a:r>
-              <a:rPr sz="1400" b="1">
-                <a:solidFill>
-                  <a:srgbClr val="202122"/>
-                </a:solidFill>
-                <a:latin typeface="Calibri"/>
-              </a:rPr>
-              <a:t>4</a:t>
-            </a:r>
-          </a:p>
-        </p:txBody>
-      </p:sp>
-      <p:sp>
-        <p:nvSpPr>
-          <p:cNvPr id="13" name="TextBox 12"/>
+              <a:t>How should jargon be handled?</a:t>
+            </a:r>
+          </a:p>
+        </p:txBody>
+      </p:sp>
+      <p:sp>
+        <p:nvSpPr>
+          <p:cNvPr id="12" name="TextBox 11"/>
           <p:cNvSpPr txBox="1"/>
           <p:nvPr/>
         </p:nvSpPr>
         <p:spPr>
           <a:xfrm>
-            <a:off x="1234440" y="5186933"/>
-            <a:ext cx="10408615" cy="1030986"/>
+            <a:off x="548640" y="5852160"/>
+            <a:ext cx="11094415" cy="365760"/>
           </a:xfrm>
           <a:prstGeom prst="rect">
             <a:avLst/>
@@ -6901,13 +9116,13 @@
           <a:p>
             <a:pPr algn="l"/>
             <a:r>
-              <a:rPr sz="2200" b="0" i="0">
-                <a:solidFill>
-                  <a:srgbClr val="202122"/>
-                </a:solidFill>
-                <a:latin typeface="Calibri"/>
-              </a:rPr>
-              <a:t>What should you consider when explaining a solution?</a:t>
+              <a:rPr sz="1300" b="0" i="1">
+                <a:solidFill>
+                  <a:srgbClr val="54595D"/>
+                </a:solidFill>
+                <a:latin typeface="Calibri"/>
+              </a:rPr>
+              <a:t>Answer on mini whiteboards or in your book. Answers are in the speaker notes.</a:t>
             </a:r>
           </a:p>
         </p:txBody>
@@ -6999,7 +9214,7 @@
                 </a:solidFill>
                 <a:latin typeface="Cambria"/>
               </a:rPr>
-              <a:t>Answers</a:t>
+              <a:t>Training users</a:t>
             </a:r>
           </a:p>
         </p:txBody>
@@ -7072,14 +9287,145 @@
       </p:sp>
       <p:sp>
         <p:nvSpPr>
-          <p:cNvPr id="6" name="Oval 5"/>
+          <p:cNvPr id="6" name="TextBox 5"/>
+          <p:cNvSpPr txBox="1"/>
+          <p:nvPr/>
+        </p:nvSpPr>
+        <p:spPr>
+          <a:xfrm>
+            <a:off x="548640" y="1554480"/>
+            <a:ext cx="6720840" cy="4617720"/>
+          </a:xfrm>
+          <a:prstGeom prst="rect">
+            <a:avLst/>
+          </a:prstGeom>
+          <a:noFill/>
+        </p:spPr>
+        <p:txBody>
+          <a:bodyPr wrap="square" lIns="0" rIns="0" tIns="0" bIns="0">
+            <a:spAutoFit/>
+          </a:bodyPr>
+          <a:lstStyle/>
+          <a:p>
+            <a:pPr>
+              <a:spcAft>
+                <a:spcPts val="1200"/>
+              </a:spcAft>
+            </a:pPr>
+            <a:r>
+              <a:rPr sz="2000" b="0">
+                <a:solidFill>
+                  <a:srgbClr val="202122"/>
+                </a:solidFill>
+                <a:latin typeface="Calibri"/>
+              </a:rPr>
+              <a:t>Good training helps people use systems confidently and cuts support calls.</a:t>
+            </a:r>
+          </a:p>
+          <a:p>
+            <a:pPr>
+              <a:spcAft>
+                <a:spcPts val="1200"/>
+              </a:spcAft>
+            </a:pPr>
+            <a:r>
+              <a:rPr sz="2000" b="0">
+                <a:solidFill>
+                  <a:srgbClr val="202122"/>
+                </a:solidFill>
+                <a:latin typeface="Calibri"/>
+              </a:rPr>
+              <a:t>Methods include shadowing and desk-side support, remote support, e-learning and simulation, VR and AR, smart boards, and gamified apps such as Kahoot! and Padlet.</a:t>
+            </a:r>
+          </a:p>
+          <a:p>
+            <a:pPr>
+              <a:spcAft>
+                <a:spcPts val="1200"/>
+              </a:spcAft>
+            </a:pPr>
+            <a:r>
+              <a:rPr sz="2000" b="0">
+                <a:solidFill>
+                  <a:srgbClr val="202122"/>
+                </a:solidFill>
+                <a:latin typeface="Calibri"/>
+              </a:rPr>
+              <a:t>Tools include crib sheets and quick-reference guides, webinars and screencasts, virtual and managed learning environments (VLEs and MLEs), sandboxed practice environments where mistakes don't matter, and MOOCs.</a:t>
+            </a:r>
+          </a:p>
+          <a:p>
+            <a:pPr>
+              <a:spcAft>
+                <a:spcPts val="1200"/>
+              </a:spcAft>
+            </a:pPr>
+            <a:r>
+              <a:rPr sz="2000" b="0">
+                <a:solidFill>
+                  <a:srgbClr val="202122"/>
+                </a:solidFill>
+                <a:latin typeface="Calibri"/>
+              </a:rPr>
+              <a:t>Choose based on the audience, the task, the time available and how many people need training.</a:t>
+            </a:r>
+          </a:p>
+        </p:txBody>
+      </p:sp>
+      <p:sp>
+        <p:nvSpPr>
+          <p:cNvPr id="7" name="Rounded Rectangle 6"/>
           <p:cNvSpPr/>
           <p:nvPr/>
         </p:nvSpPr>
         <p:spPr>
           <a:xfrm>
-            <a:off x="548640" y="1618488"/>
-            <a:ext cx="411480" cy="411480"/>
+            <a:off x="7772400" y="1554480"/>
+            <a:ext cx="3867912" cy="4526280"/>
+          </a:xfrm>
+          <a:prstGeom prst="roundRect">
+            <a:avLst>
+              <a:gd name="adj" fmla="val 8000"/>
+            </a:avLst>
+          </a:prstGeom>
+          <a:solidFill>
+            <a:srgbClr val="03306E"/>
+          </a:solidFill>
+          <a:ln>
+            <a:noFill/>
+          </a:ln>
+          <a:effectLst/>
+        </p:spPr>
+        <p:style>
+          <a:lnRef idx="1">
+            <a:schemeClr val="accent1"/>
+          </a:lnRef>
+          <a:fillRef idx="3">
+            <a:schemeClr val="accent1"/>
+          </a:fillRef>
+          <a:effectRef idx="2">
+            <a:schemeClr val="accent1"/>
+          </a:effectRef>
+          <a:fontRef idx="minor">
+            <a:schemeClr val="lt1"/>
+          </a:fontRef>
+        </p:style>
+        <p:txBody>
+          <a:bodyPr rtlCol="0" anchor="ctr"/>
+          <a:lstStyle/>
+          <a:p/>
+        </p:txBody>
+      </p:sp>
+      <p:sp>
+        <p:nvSpPr>
+          <p:cNvPr id="8" name="Oval 7"/>
+          <p:cNvSpPr/>
+          <p:nvPr/>
+        </p:nvSpPr>
+        <p:spPr>
+          <a:xfrm>
+            <a:off x="8046720" y="1828800"/>
+            <a:ext cx="548640" cy="548640"/>
           </a:xfrm>
           <a:prstGeom prst="ellipse">
             <a:avLst/>
@@ -7112,110 +9458,13 @@
           <a:p>
             <a:pPr algn="ctr"/>
             <a:r>
-              <a:rPr sz="1400" b="1">
+              <a:rPr sz="1300" b="1">
                 <a:solidFill>
                   <a:srgbClr val="202122"/>
                 </a:solidFill>
                 <a:latin typeface="Calibri"/>
               </a:rPr>
-              <a:t>1</a:t>
-            </a:r>
-          </a:p>
-        </p:txBody>
-      </p:sp>
-      <p:sp>
-        <p:nvSpPr>
-          <p:cNvPr id="7" name="TextBox 6"/>
-          <p:cNvSpPr txBox="1"/>
-          <p:nvPr/>
-        </p:nvSpPr>
-        <p:spPr>
-          <a:xfrm>
-            <a:off x="1234440" y="1600200"/>
-            <a:ext cx="10408615" cy="1030986"/>
-          </a:xfrm>
-          <a:prstGeom prst="rect">
-            <a:avLst/>
-          </a:prstGeom>
-          <a:noFill/>
-        </p:spPr>
-        <p:txBody>
-          <a:bodyPr wrap="square" anchor="t" lIns="0" rIns="0" tIns="0" bIns="0"/>
-          <a:lstStyle/>
-          <a:p>
-            <a:pPr algn="l"/>
-            <a:r>
-              <a:rPr sz="1800" b="0" i="0">
-                <a:solidFill>
-                  <a:srgbClr val="54595D"/>
-                </a:solidFill>
-                <a:latin typeface="Calibri"/>
-              </a:rPr>
-              <a:t>Give a digital technology used in HR.</a:t>
-            </a:r>
-          </a:p>
-          <a:p>
-            <a:r>
-              <a:rPr sz="1800" b="1">
-                <a:solidFill>
-                  <a:srgbClr val="03306E"/>
-                </a:solidFill>
-                <a:latin typeface="Calibri"/>
-              </a:rPr>
-              <a:t>Personnel systems or digital training.</a:t>
-            </a:r>
-          </a:p>
-        </p:txBody>
-      </p:sp>
-      <p:sp>
-        <p:nvSpPr>
-          <p:cNvPr id="8" name="Oval 7"/>
-          <p:cNvSpPr/>
-          <p:nvPr/>
-        </p:nvSpPr>
-        <p:spPr>
-          <a:xfrm>
-            <a:off x="548640" y="2814066"/>
-            <a:ext cx="411480" cy="411480"/>
-          </a:xfrm>
-          <a:prstGeom prst="ellipse">
-            <a:avLst/>
-          </a:prstGeom>
-          <a:solidFill>
-            <a:srgbClr val="4EA1FF"/>
-          </a:solidFill>
-          <a:ln>
-            <a:noFill/>
-          </a:ln>
-          <a:effectLst/>
-        </p:spPr>
-        <p:style>
-          <a:lnRef idx="1">
-            <a:schemeClr val="accent1"/>
-          </a:lnRef>
-          <a:fillRef idx="3">
-            <a:schemeClr val="accent1"/>
-          </a:fillRef>
-          <a:effectRef idx="2">
-            <a:schemeClr val="accent1"/>
-          </a:effectRef>
-          <a:fontRef idx="minor">
-            <a:schemeClr val="lt1"/>
-          </a:fontRef>
-        </p:style>
-        <p:txBody>
-          <a:bodyPr rtlCol="0" anchor="ctr" lIns="0" rIns="0" tIns="0" bIns="0"/>
-          <a:lstStyle/>
-          <a:p>
-            <a:pPr algn="ctr"/>
-            <a:r>
-              <a:rPr sz="1400" b="1">
-                <a:solidFill>
-                  <a:srgbClr val="202122"/>
-                </a:solidFill>
-                <a:latin typeface="Calibri"/>
-              </a:rPr>
-              <a:t>2</a:t>
+              <a:t>e.g.</a:t>
             </a:r>
           </a:p>
         </p:txBody>
@@ -7228,8 +9477,8 @@
         </p:nvSpPr>
         <p:spPr>
           <a:xfrm>
-            <a:off x="1234440" y="2795778"/>
-            <a:ext cx="10408615" cy="1030986"/>
+            <a:off x="8046720" y="2560320"/>
+            <a:ext cx="3291840" cy="365760"/>
           </a:xfrm>
           <a:prstGeom prst="rect">
             <a:avLst/>
@@ -7242,91 +9491,27 @@
           <a:p>
             <a:pPr algn="l"/>
             <a:r>
-              <a:rPr sz="1800" b="0" i="0">
-                <a:solidFill>
-                  <a:srgbClr val="54595D"/>
-                </a:solidFill>
-                <a:latin typeface="Calibri"/>
-              </a:rPr>
-              <a:t>What is a crib sheet?</a:t>
-            </a:r>
-          </a:p>
-          <a:p>
-            <a:r>
-              <a:rPr sz="1800" b="1">
-                <a:solidFill>
-                  <a:srgbClr val="03306E"/>
-                </a:solidFill>
-                <a:latin typeface="Calibri"/>
-              </a:rPr>
-              <a:t>A short, quick-reference guide.</a:t>
-            </a:r>
-          </a:p>
-        </p:txBody>
-      </p:sp>
-      <p:sp>
-        <p:nvSpPr>
-          <p:cNvPr id="10" name="Oval 9"/>
-          <p:cNvSpPr/>
-          <p:nvPr/>
-        </p:nvSpPr>
-        <p:spPr>
-          <a:xfrm>
-            <a:off x="548640" y="4009644"/>
-            <a:ext cx="411480" cy="411480"/>
-          </a:xfrm>
-          <a:prstGeom prst="ellipse">
-            <a:avLst/>
-          </a:prstGeom>
-          <a:solidFill>
-            <a:srgbClr val="4EA1FF"/>
-          </a:solidFill>
-          <a:ln>
-            <a:noFill/>
-          </a:ln>
-          <a:effectLst/>
-        </p:spPr>
-        <p:style>
-          <a:lnRef idx="1">
-            <a:schemeClr val="accent1"/>
-          </a:lnRef>
-          <a:fillRef idx="3">
-            <a:schemeClr val="accent1"/>
-          </a:fillRef>
-          <a:effectRef idx="2">
-            <a:schemeClr val="accent1"/>
-          </a:effectRef>
-          <a:fontRef idx="minor">
-            <a:schemeClr val="lt1"/>
-          </a:fontRef>
-        </p:style>
-        <p:txBody>
-          <a:bodyPr rtlCol="0" anchor="ctr" lIns="0" rIns="0" tIns="0" bIns="0"/>
-          <a:lstStyle/>
-          <a:p>
-            <a:pPr algn="ctr"/>
-            <a:r>
-              <a:rPr sz="1400" b="1">
-                <a:solidFill>
-                  <a:srgbClr val="202122"/>
-                </a:solidFill>
-                <a:latin typeface="Calibri"/>
-              </a:rPr>
-              <a:t>3</a:t>
-            </a:r>
-          </a:p>
-        </p:txBody>
-      </p:sp>
-      <p:sp>
-        <p:nvSpPr>
-          <p:cNvPr id="11" name="TextBox 10"/>
+              <a:rPr sz="1300" b="1" i="0">
+                <a:solidFill>
+                  <a:srgbClr val="A9C8F0"/>
+                </a:solidFill>
+                <a:latin typeface="Calibri"/>
+              </a:rPr>
+              <a:t>EXAMPLE</a:t>
+            </a:r>
+          </a:p>
+        </p:txBody>
+      </p:sp>
+      <p:sp>
+        <p:nvSpPr>
+          <p:cNvPr id="10" name="TextBox 9"/>
           <p:cNvSpPr txBox="1"/>
           <p:nvPr/>
         </p:nvSpPr>
         <p:spPr>
           <a:xfrm>
-            <a:off x="1234440" y="3991356"/>
-            <a:ext cx="10408615" cy="1030986"/>
+            <a:off x="8046720" y="2971800"/>
+            <a:ext cx="3291840" cy="2971800"/>
           </a:xfrm>
           <a:prstGeom prst="rect">
             <a:avLst/>
@@ -7339,121 +9524,13 @@
           <a:p>
             <a:pPr algn="l"/>
             <a:r>
-              <a:rPr sz="1800" b="0" i="0">
-                <a:solidFill>
-                  <a:srgbClr val="54595D"/>
-                </a:solidFill>
-                <a:latin typeface="Calibri"/>
-              </a:rPr>
-              <a:t>Why use a sandboxed environment for training?</a:t>
-            </a:r>
-          </a:p>
-          <a:p>
-            <a:r>
-              <a:rPr sz="1800" b="1">
-                <a:solidFill>
-                  <a:srgbClr val="03306E"/>
-                </a:solidFill>
-                <a:latin typeface="Calibri"/>
-              </a:rPr>
-              <a:t>Users can practise without affecting live systems.</a:t>
-            </a:r>
-          </a:p>
-        </p:txBody>
-      </p:sp>
-      <p:sp>
-        <p:nvSpPr>
-          <p:cNvPr id="12" name="Oval 11"/>
-          <p:cNvSpPr/>
-          <p:nvPr/>
-        </p:nvSpPr>
-        <p:spPr>
-          <a:xfrm>
-            <a:off x="548640" y="5205221"/>
-            <a:ext cx="411480" cy="411480"/>
-          </a:xfrm>
-          <a:prstGeom prst="ellipse">
-            <a:avLst/>
-          </a:prstGeom>
-          <a:solidFill>
-            <a:srgbClr val="4EA1FF"/>
-          </a:solidFill>
-          <a:ln>
-            <a:noFill/>
-          </a:ln>
-          <a:effectLst/>
-        </p:spPr>
-        <p:style>
-          <a:lnRef idx="1">
-            <a:schemeClr val="accent1"/>
-          </a:lnRef>
-          <a:fillRef idx="3">
-            <a:schemeClr val="accent1"/>
-          </a:fillRef>
-          <a:effectRef idx="2">
-            <a:schemeClr val="accent1"/>
-          </a:effectRef>
-          <a:fontRef idx="minor">
-            <a:schemeClr val="lt1"/>
-          </a:fontRef>
-        </p:style>
-        <p:txBody>
-          <a:bodyPr rtlCol="0" anchor="ctr" lIns="0" rIns="0" tIns="0" bIns="0"/>
-          <a:lstStyle/>
-          <a:p>
-            <a:pPr algn="ctr"/>
-            <a:r>
-              <a:rPr sz="1400" b="1">
-                <a:solidFill>
-                  <a:srgbClr val="202122"/>
-                </a:solidFill>
-                <a:latin typeface="Calibri"/>
-              </a:rPr>
-              <a:t>4</a:t>
-            </a:r>
-          </a:p>
-        </p:txBody>
-      </p:sp>
-      <p:sp>
-        <p:nvSpPr>
-          <p:cNvPr id="13" name="TextBox 12"/>
-          <p:cNvSpPr txBox="1"/>
-          <p:nvPr/>
-        </p:nvSpPr>
-        <p:spPr>
-          <a:xfrm>
-            <a:off x="1234440" y="5186933"/>
-            <a:ext cx="10408615" cy="1030986"/>
-          </a:xfrm>
-          <a:prstGeom prst="rect">
-            <a:avLst/>
-          </a:prstGeom>
-          <a:noFill/>
-        </p:spPr>
-        <p:txBody>
-          <a:bodyPr wrap="square" anchor="t" lIns="0" rIns="0" tIns="0" bIns="0"/>
-          <a:lstStyle/>
-          <a:p>
-            <a:pPr algn="l"/>
-            <a:r>
-              <a:rPr sz="1800" b="0" i="0">
-                <a:solidFill>
-                  <a:srgbClr val="54595D"/>
-                </a:solidFill>
-                <a:latin typeface="Calibri"/>
-              </a:rPr>
-              <a:t>What should you consider when explaining a solution?</a:t>
-            </a:r>
-          </a:p>
-          <a:p>
-            <a:r>
-              <a:rPr sz="1800" b="1">
-                <a:solidFill>
-                  <a:srgbClr val="03306E"/>
-                </a:solidFill>
-                <a:latin typeface="Calibri"/>
-              </a:rPr>
-              <a:t>The audience, and using clear, concise technical terms.</a:t>
+              <a:rPr sz="1900" b="0" i="0">
+                <a:solidFill>
+                  <a:srgbClr val="FFFFFF"/>
+                </a:solidFill>
+                <a:latin typeface="Cambria"/>
+              </a:rPr>
+              <a:t>Rolling out MFA to 300 staff: a two-minute screencast, a one-page crib sheet, and drop-in desk-side help on launch day.</a:t>
             </a:r>
           </a:p>
         </p:txBody>
@@ -7545,7 +9622,7 @@
                 </a:solidFill>
                 <a:latin typeface="Cambria"/>
               </a:rPr>
-              <a:t>Activity: Make a crib sheet and screencast</a:t>
+              <a:t>Training users</a:t>
             </a:r>
           </a:p>
         </p:txBody>
@@ -7624,16 +9701,16 @@
         </p:nvSpPr>
         <p:spPr>
           <a:xfrm>
-            <a:off x="548640" y="1508760"/>
-            <a:ext cx="2011680" cy="457200"/>
+            <a:off x="548640" y="1600200"/>
+            <a:ext cx="5364327" cy="640080"/>
           </a:xfrm>
           <a:prstGeom prst="roundRect">
             <a:avLst>
-              <a:gd name="adj" fmla="val 50000"/>
+              <a:gd name="adj" fmla="val 15000"/>
             </a:avLst>
           </a:prstGeom>
           <a:solidFill>
-            <a:srgbClr val="4EA1FF"/>
+            <a:srgbClr val="03306E"/>
           </a:solidFill>
           <a:ln>
             <a:noFill/>
@@ -7668,8 +9745,8 @@
         </p:nvSpPr>
         <p:spPr>
           <a:xfrm>
-            <a:off x="548640" y="1508760"/>
-            <a:ext cx="2011680" cy="457200"/>
+            <a:off x="777240" y="1600200"/>
+            <a:ext cx="4907127" cy="640080"/>
           </a:xfrm>
           <a:prstGeom prst="rect">
             <a:avLst/>
@@ -7680,65 +9757,206 @@
           <a:bodyPr wrap="square" anchor="ctr" lIns="0" rIns="0" tIns="0" bIns="0"/>
           <a:lstStyle/>
           <a:p>
-            <a:pPr algn="ctr"/>
-            <a:r>
-              <a:rPr sz="1400" b="1" i="0">
+            <a:pPr algn="l"/>
+            <a:r>
+              <a:rPr sz="2000" b="1" i="0">
+                <a:solidFill>
+                  <a:srgbClr val="FFFFFF"/>
+                </a:solidFill>
+                <a:latin typeface="Calibri"/>
+              </a:rPr>
+              <a:t>Methods</a:t>
+            </a:r>
+          </a:p>
+        </p:txBody>
+      </p:sp>
+      <p:sp>
+        <p:nvSpPr>
+          <p:cNvPr id="8" name="Rounded Rectangle 7"/>
+          <p:cNvSpPr/>
+          <p:nvPr/>
+        </p:nvSpPr>
+        <p:spPr>
+          <a:xfrm>
+            <a:off x="548640" y="2377440"/>
+            <a:ext cx="5364327" cy="3794760"/>
+          </a:xfrm>
+          <a:prstGeom prst="roundRect">
+            <a:avLst>
+              <a:gd name="adj" fmla="val 4000"/>
+            </a:avLst>
+          </a:prstGeom>
+          <a:solidFill>
+            <a:srgbClr val="EAF3FF"/>
+          </a:solidFill>
+          <a:ln>
+            <a:noFill/>
+          </a:ln>
+          <a:effectLst/>
+        </p:spPr>
+        <p:style>
+          <a:lnRef idx="1">
+            <a:schemeClr val="accent1"/>
+          </a:lnRef>
+          <a:fillRef idx="3">
+            <a:schemeClr val="accent1"/>
+          </a:fillRef>
+          <a:effectRef idx="2">
+            <a:schemeClr val="accent1"/>
+          </a:effectRef>
+          <a:fontRef idx="minor">
+            <a:schemeClr val="lt1"/>
+          </a:fontRef>
+        </p:style>
+        <p:txBody>
+          <a:bodyPr rtlCol="0" anchor="ctr"/>
+          <a:lstStyle/>
+          <a:p/>
+        </p:txBody>
+      </p:sp>
+      <p:sp>
+        <p:nvSpPr>
+          <p:cNvPr id="9" name="TextBox 8"/>
+          <p:cNvSpPr txBox="1"/>
+          <p:nvPr/>
+        </p:nvSpPr>
+        <p:spPr>
+          <a:xfrm>
+            <a:off x="822959" y="2606040"/>
+            <a:ext cx="4815687" cy="3337560"/>
+          </a:xfrm>
+          <a:prstGeom prst="rect">
+            <a:avLst/>
+          </a:prstGeom>
+          <a:noFill/>
+        </p:spPr>
+        <p:txBody>
+          <a:bodyPr wrap="square" lIns="0" rIns="0" tIns="0" bIns="0">
+            <a:spAutoFit/>
+          </a:bodyPr>
+          <a:lstStyle/>
+          <a:p>
+            <a:pPr marL="274320" indent="-274320">
+              <a:spcAft>
+                <a:spcPts val="990"/>
+              </a:spcAft>
+              <a:buClr>
+                <a:srgbClr val="0645AD"/>
+              </a:buClr>
+              <a:buFont typeface="Arial"/>
+              <a:buChar char="•"/>
+            </a:pPr>
+            <a:r>
+              <a:rPr sz="2200" b="0">
                 <a:solidFill>
                   <a:srgbClr val="202122"/>
                 </a:solidFill>
                 <a:latin typeface="Calibri"/>
               </a:rPr>
-              <a:t>35 minutes</a:t>
-            </a:r>
-          </a:p>
-        </p:txBody>
-      </p:sp>
-      <p:sp>
-        <p:nvSpPr>
-          <p:cNvPr id="8" name="TextBox 7"/>
-          <p:cNvSpPr txBox="1"/>
-          <p:nvPr/>
-        </p:nvSpPr>
-        <p:spPr>
-          <a:xfrm>
-            <a:off x="2743200" y="1508760"/>
-            <a:ext cx="4754880" cy="457200"/>
-          </a:xfrm>
-          <a:prstGeom prst="rect">
-            <a:avLst/>
-          </a:prstGeom>
-          <a:noFill/>
-        </p:spPr>
-        <p:txBody>
-          <a:bodyPr wrap="square" anchor="ctr" lIns="0" rIns="0" tIns="0" bIns="0"/>
-          <a:lstStyle/>
-          <a:p>
-            <a:pPr algn="l"/>
-            <a:r>
-              <a:rPr sz="1400" b="0" i="1">
-                <a:solidFill>
-                  <a:srgbClr val="54595D"/>
-                </a:solidFill>
-                <a:latin typeface="Calibri"/>
-              </a:rPr>
-              <a:t>Individual</a:t>
-            </a:r>
-          </a:p>
-        </p:txBody>
-      </p:sp>
-      <p:sp>
-        <p:nvSpPr>
-          <p:cNvPr id="9" name="Oval 8"/>
+              <a:t>Shadowing and desk-side support</a:t>
+            </a:r>
+          </a:p>
+          <a:p>
+            <a:pPr marL="274320" indent="-274320">
+              <a:spcAft>
+                <a:spcPts val="990"/>
+              </a:spcAft>
+              <a:buClr>
+                <a:srgbClr val="0645AD"/>
+              </a:buClr>
+              <a:buFont typeface="Arial"/>
+              <a:buChar char="•"/>
+            </a:pPr>
+            <a:r>
+              <a:rPr sz="2200" b="0">
+                <a:solidFill>
+                  <a:srgbClr val="202122"/>
+                </a:solidFill>
+                <a:latin typeface="Calibri"/>
+              </a:rPr>
+              <a:t>Remote support</a:t>
+            </a:r>
+          </a:p>
+          <a:p>
+            <a:pPr marL="274320" indent="-274320">
+              <a:spcAft>
+                <a:spcPts val="990"/>
+              </a:spcAft>
+              <a:buClr>
+                <a:srgbClr val="0645AD"/>
+              </a:buClr>
+              <a:buFont typeface="Arial"/>
+              <a:buChar char="•"/>
+            </a:pPr>
+            <a:r>
+              <a:rPr sz="2200" b="0">
+                <a:solidFill>
+                  <a:srgbClr val="202122"/>
+                </a:solidFill>
+                <a:latin typeface="Calibri"/>
+              </a:rPr>
+              <a:t>E-learning and simulation</a:t>
+            </a:r>
+          </a:p>
+          <a:p>
+            <a:pPr marL="274320" indent="-274320">
+              <a:spcAft>
+                <a:spcPts val="990"/>
+              </a:spcAft>
+              <a:buClr>
+                <a:srgbClr val="0645AD"/>
+              </a:buClr>
+              <a:buFont typeface="Arial"/>
+              <a:buChar char="•"/>
+            </a:pPr>
+            <a:r>
+              <a:rPr sz="2200" b="0">
+                <a:solidFill>
+                  <a:srgbClr val="202122"/>
+                </a:solidFill>
+                <a:latin typeface="Calibri"/>
+              </a:rPr>
+              <a:t>VR, AR and smart boards</a:t>
+            </a:r>
+          </a:p>
+          <a:p>
+            <a:pPr marL="274320" indent="-274320">
+              <a:spcAft>
+                <a:spcPts val="990"/>
+              </a:spcAft>
+              <a:buClr>
+                <a:srgbClr val="0645AD"/>
+              </a:buClr>
+              <a:buFont typeface="Arial"/>
+              <a:buChar char="•"/>
+            </a:pPr>
+            <a:r>
+              <a:rPr sz="2200" b="0">
+                <a:solidFill>
+                  <a:srgbClr val="202122"/>
+                </a:solidFill>
+                <a:latin typeface="Calibri"/>
+              </a:rPr>
+              <a:t>Gamified apps, e.g. Kahoot!, Padlet</a:t>
+            </a:r>
+          </a:p>
+        </p:txBody>
+      </p:sp>
+      <p:sp>
+        <p:nvSpPr>
+          <p:cNvPr id="10" name="Rounded Rectangle 9"/>
           <p:cNvSpPr/>
           <p:nvPr/>
         </p:nvSpPr>
         <p:spPr>
           <a:xfrm>
-            <a:off x="548640" y="2482596"/>
-            <a:ext cx="384048" cy="384048"/>
-          </a:xfrm>
-          <a:prstGeom prst="ellipse">
-            <a:avLst/>
+            <a:off x="6278727" y="1600200"/>
+            <a:ext cx="5364327" cy="640080"/>
+          </a:xfrm>
+          <a:prstGeom prst="roundRect">
+            <a:avLst>
+              <a:gd name="adj" fmla="val 15000"/>
+            </a:avLst>
           </a:prstGeom>
           <a:solidFill>
             <a:srgbClr val="0645AD"/>
@@ -7763,327 +9981,58 @@
           </a:fontRef>
         </p:style>
         <p:txBody>
-          <a:bodyPr rtlCol="0" anchor="ctr" lIns="0" rIns="0" tIns="0" bIns="0"/>
-          <a:lstStyle/>
-          <a:p>
-            <a:pPr algn="ctr"/>
-            <a:r>
-              <a:rPr sz="1300" b="1">
+          <a:bodyPr rtlCol="0" anchor="ctr"/>
+          <a:lstStyle/>
+          <a:p/>
+        </p:txBody>
+      </p:sp>
+      <p:sp>
+        <p:nvSpPr>
+          <p:cNvPr id="11" name="TextBox 10"/>
+          <p:cNvSpPr txBox="1"/>
+          <p:nvPr/>
+        </p:nvSpPr>
+        <p:spPr>
+          <a:xfrm>
+            <a:off x="6507327" y="1600200"/>
+            <a:ext cx="4907127" cy="640080"/>
+          </a:xfrm>
+          <a:prstGeom prst="rect">
+            <a:avLst/>
+          </a:prstGeom>
+          <a:noFill/>
+        </p:spPr>
+        <p:txBody>
+          <a:bodyPr wrap="square" anchor="ctr" lIns="0" rIns="0" tIns="0" bIns="0"/>
+          <a:lstStyle/>
+          <a:p>
+            <a:pPr algn="l"/>
+            <a:r>
+              <a:rPr sz="2000" b="1" i="0">
                 <a:solidFill>
                   <a:srgbClr val="FFFFFF"/>
                 </a:solidFill>
                 <a:latin typeface="Calibri"/>
               </a:rPr>
-              <a:t>1</a:t>
-            </a:r>
-          </a:p>
-        </p:txBody>
-      </p:sp>
-      <p:sp>
-        <p:nvSpPr>
-          <p:cNvPr id="10" name="TextBox 9"/>
-          <p:cNvSpPr txBox="1"/>
-          <p:nvPr/>
-        </p:nvSpPr>
-        <p:spPr>
-          <a:xfrm>
-            <a:off x="1143000" y="2240280"/>
-            <a:ext cx="5943600" cy="868680"/>
-          </a:xfrm>
-          <a:prstGeom prst="rect">
-            <a:avLst/>
-          </a:prstGeom>
-          <a:noFill/>
-        </p:spPr>
-        <p:txBody>
-          <a:bodyPr wrap="square" anchor="ctr" lIns="0" rIns="0" tIns="0" bIns="0"/>
-          <a:lstStyle/>
-          <a:p>
-            <a:pPr algn="l"/>
-            <a:r>
-              <a:rPr sz="1700" b="0" i="0">
-                <a:solidFill>
-                  <a:srgbClr val="202122"/>
-                </a:solidFill>
-                <a:latin typeface="Calibri"/>
-              </a:rPr>
-              <a:t>Choose a task: setting up MFA, sharing a file securely, or booking a meeting room.</a:t>
-            </a:r>
-          </a:p>
-        </p:txBody>
-      </p:sp>
-      <p:sp>
-        <p:nvSpPr>
-          <p:cNvPr id="11" name="Oval 10"/>
+              <a:t>Tools</a:t>
+            </a:r>
+          </a:p>
+        </p:txBody>
+      </p:sp>
+      <p:sp>
+        <p:nvSpPr>
+          <p:cNvPr id="12" name="Rounded Rectangle 11"/>
           <p:cNvSpPr/>
           <p:nvPr/>
         </p:nvSpPr>
         <p:spPr>
           <a:xfrm>
-            <a:off x="548640" y="3461004"/>
-            <a:ext cx="384048" cy="384048"/>
-          </a:xfrm>
-          <a:prstGeom prst="ellipse">
-            <a:avLst/>
-          </a:prstGeom>
-          <a:solidFill>
-            <a:srgbClr val="0645AD"/>
-          </a:solidFill>
-          <a:ln>
-            <a:noFill/>
-          </a:ln>
-          <a:effectLst/>
-        </p:spPr>
-        <p:style>
-          <a:lnRef idx="1">
-            <a:schemeClr val="accent1"/>
-          </a:lnRef>
-          <a:fillRef idx="3">
-            <a:schemeClr val="accent1"/>
-          </a:fillRef>
-          <a:effectRef idx="2">
-            <a:schemeClr val="accent1"/>
-          </a:effectRef>
-          <a:fontRef idx="minor">
-            <a:schemeClr val="lt1"/>
-          </a:fontRef>
-        </p:style>
-        <p:txBody>
-          <a:bodyPr rtlCol="0" anchor="ctr" lIns="0" rIns="0" tIns="0" bIns="0"/>
-          <a:lstStyle/>
-          <a:p>
-            <a:pPr algn="ctr"/>
-            <a:r>
-              <a:rPr sz="1300" b="1">
-                <a:solidFill>
-                  <a:srgbClr val="FFFFFF"/>
-                </a:solidFill>
-                <a:latin typeface="Calibri"/>
-              </a:rPr>
-              <a:t>2</a:t>
-            </a:r>
-          </a:p>
-        </p:txBody>
-      </p:sp>
-      <p:sp>
-        <p:nvSpPr>
-          <p:cNvPr id="12" name="TextBox 11"/>
-          <p:cNvSpPr txBox="1"/>
-          <p:nvPr/>
-        </p:nvSpPr>
-        <p:spPr>
-          <a:xfrm>
-            <a:off x="1143000" y="3218688"/>
-            <a:ext cx="5943600" cy="868680"/>
-          </a:xfrm>
-          <a:prstGeom prst="rect">
-            <a:avLst/>
-          </a:prstGeom>
-          <a:noFill/>
-        </p:spPr>
-        <p:txBody>
-          <a:bodyPr wrap="square" anchor="ctr" lIns="0" rIns="0" tIns="0" bIns="0"/>
-          <a:lstStyle/>
-          <a:p>
-            <a:pPr algn="l"/>
-            <a:r>
-              <a:rPr sz="1700" b="0" i="0">
-                <a:solidFill>
-                  <a:srgbClr val="202122"/>
-                </a:solidFill>
-                <a:latin typeface="Calibri"/>
-              </a:rPr>
-              <a:t>Write a one-page crib sheet for a non-technical user.</a:t>
-            </a:r>
-          </a:p>
-        </p:txBody>
-      </p:sp>
-      <p:sp>
-        <p:nvSpPr>
-          <p:cNvPr id="13" name="Oval 12"/>
-          <p:cNvSpPr/>
-          <p:nvPr/>
-        </p:nvSpPr>
-        <p:spPr>
-          <a:xfrm>
-            <a:off x="548640" y="4439412"/>
-            <a:ext cx="384048" cy="384048"/>
-          </a:xfrm>
-          <a:prstGeom prst="ellipse">
-            <a:avLst/>
-          </a:prstGeom>
-          <a:solidFill>
-            <a:srgbClr val="0645AD"/>
-          </a:solidFill>
-          <a:ln>
-            <a:noFill/>
-          </a:ln>
-          <a:effectLst/>
-        </p:spPr>
-        <p:style>
-          <a:lnRef idx="1">
-            <a:schemeClr val="accent1"/>
-          </a:lnRef>
-          <a:fillRef idx="3">
-            <a:schemeClr val="accent1"/>
-          </a:fillRef>
-          <a:effectRef idx="2">
-            <a:schemeClr val="accent1"/>
-          </a:effectRef>
-          <a:fontRef idx="minor">
-            <a:schemeClr val="lt1"/>
-          </a:fontRef>
-        </p:style>
-        <p:txBody>
-          <a:bodyPr rtlCol="0" anchor="ctr" lIns="0" rIns="0" tIns="0" bIns="0"/>
-          <a:lstStyle/>
-          <a:p>
-            <a:pPr algn="ctr"/>
-            <a:r>
-              <a:rPr sz="1300" b="1">
-                <a:solidFill>
-                  <a:srgbClr val="FFFFFF"/>
-                </a:solidFill>
-                <a:latin typeface="Calibri"/>
-              </a:rPr>
-              <a:t>3</a:t>
-            </a:r>
-          </a:p>
-        </p:txBody>
-      </p:sp>
-      <p:sp>
-        <p:nvSpPr>
-          <p:cNvPr id="14" name="TextBox 13"/>
-          <p:cNvSpPr txBox="1"/>
-          <p:nvPr/>
-        </p:nvSpPr>
-        <p:spPr>
-          <a:xfrm>
-            <a:off x="1143000" y="4197096"/>
-            <a:ext cx="5943600" cy="868680"/>
-          </a:xfrm>
-          <a:prstGeom prst="rect">
-            <a:avLst/>
-          </a:prstGeom>
-          <a:noFill/>
-        </p:spPr>
-        <p:txBody>
-          <a:bodyPr wrap="square" anchor="ctr" lIns="0" rIns="0" tIns="0" bIns="0"/>
-          <a:lstStyle/>
-          <a:p>
-            <a:pPr algn="l"/>
-            <a:r>
-              <a:rPr sz="1700" b="0" i="0">
-                <a:solidFill>
-                  <a:srgbClr val="202122"/>
-                </a:solidFill>
-                <a:latin typeface="Calibri"/>
-              </a:rPr>
-              <a:t>Record a screencast of under two minutes showing the task.</a:t>
-            </a:r>
-          </a:p>
-        </p:txBody>
-      </p:sp>
-      <p:sp>
-        <p:nvSpPr>
-          <p:cNvPr id="15" name="Oval 14"/>
-          <p:cNvSpPr/>
-          <p:nvPr/>
-        </p:nvSpPr>
-        <p:spPr>
-          <a:xfrm>
-            <a:off x="548640" y="5417820"/>
-            <a:ext cx="384048" cy="384048"/>
-          </a:xfrm>
-          <a:prstGeom prst="ellipse">
-            <a:avLst/>
-          </a:prstGeom>
-          <a:solidFill>
-            <a:srgbClr val="0645AD"/>
-          </a:solidFill>
-          <a:ln>
-            <a:noFill/>
-          </a:ln>
-          <a:effectLst/>
-        </p:spPr>
-        <p:style>
-          <a:lnRef idx="1">
-            <a:schemeClr val="accent1"/>
-          </a:lnRef>
-          <a:fillRef idx="3">
-            <a:schemeClr val="accent1"/>
-          </a:fillRef>
-          <a:effectRef idx="2">
-            <a:schemeClr val="accent1"/>
-          </a:effectRef>
-          <a:fontRef idx="minor">
-            <a:schemeClr val="lt1"/>
-          </a:fontRef>
-        </p:style>
-        <p:txBody>
-          <a:bodyPr rtlCol="0" anchor="ctr" lIns="0" rIns="0" tIns="0" bIns="0"/>
-          <a:lstStyle/>
-          <a:p>
-            <a:pPr algn="ctr"/>
-            <a:r>
-              <a:rPr sz="1300" b="1">
-                <a:solidFill>
-                  <a:srgbClr val="FFFFFF"/>
-                </a:solidFill>
-                <a:latin typeface="Calibri"/>
-              </a:rPr>
-              <a:t>4</a:t>
-            </a:r>
-          </a:p>
-        </p:txBody>
-      </p:sp>
-      <p:sp>
-        <p:nvSpPr>
-          <p:cNvPr id="16" name="TextBox 15"/>
-          <p:cNvSpPr txBox="1"/>
-          <p:nvPr/>
-        </p:nvSpPr>
-        <p:spPr>
-          <a:xfrm>
-            <a:off x="1143000" y="5175504"/>
-            <a:ext cx="5943600" cy="868680"/>
-          </a:xfrm>
-          <a:prstGeom prst="rect">
-            <a:avLst/>
-          </a:prstGeom>
-          <a:noFill/>
-        </p:spPr>
-        <p:txBody>
-          <a:bodyPr wrap="square" anchor="ctr" lIns="0" rIns="0" tIns="0" bIns="0"/>
-          <a:lstStyle/>
-          <a:p>
-            <a:pPr algn="l"/>
-            <a:r>
-              <a:rPr sz="1700" b="0" i="0">
-                <a:solidFill>
-                  <a:srgbClr val="202122"/>
-                </a:solidFill>
-                <a:latin typeface="Calibri"/>
-              </a:rPr>
-              <a:t>Get feedback from a partner and improve one thing.</a:t>
-            </a:r>
-          </a:p>
-        </p:txBody>
-      </p:sp>
-      <p:sp>
-        <p:nvSpPr>
-          <p:cNvPr id="17" name="Rounded Rectangle 16"/>
-          <p:cNvSpPr/>
-          <p:nvPr/>
-        </p:nvSpPr>
-        <p:spPr>
-          <a:xfrm>
-            <a:off x="7772400" y="1508760"/>
-            <a:ext cx="3867912" cy="4572000"/>
+            <a:off x="6278727" y="2377440"/>
+            <a:ext cx="5364327" cy="3794760"/>
           </a:xfrm>
           <a:prstGeom prst="roundRect">
             <a:avLst>
-              <a:gd name="adj" fmla="val 8000"/>
+              <a:gd name="adj" fmla="val 4000"/>
             </a:avLst>
           </a:prstGeom>
           <a:solidFill>
@@ -8116,47 +10065,14 @@
       </p:sp>
       <p:sp>
         <p:nvSpPr>
-          <p:cNvPr id="18" name="TextBox 17"/>
+          <p:cNvPr id="13" name="TextBox 12"/>
           <p:cNvSpPr txBox="1"/>
           <p:nvPr/>
         </p:nvSpPr>
         <p:spPr>
           <a:xfrm>
-            <a:off x="8046720" y="1737360"/>
-            <a:ext cx="3291840" cy="365760"/>
-          </a:xfrm>
-          <a:prstGeom prst="rect">
-            <a:avLst/>
-          </a:prstGeom>
-          <a:noFill/>
-        </p:spPr>
-        <p:txBody>
-          <a:bodyPr wrap="square" anchor="t" lIns="0" rIns="0" tIns="0" bIns="0"/>
-          <a:lstStyle/>
-          <a:p>
-            <a:pPr algn="l"/>
-            <a:r>
-              <a:rPr sz="1300" b="1" i="0">
-                <a:solidFill>
-                  <a:srgbClr val="0645AD"/>
-                </a:solidFill>
-                <a:latin typeface="Calibri"/>
-              </a:rPr>
-              <a:t>SUCCESS CRITERIA</a:t>
-            </a:r>
-          </a:p>
-        </p:txBody>
-      </p:sp>
-      <p:sp>
-        <p:nvSpPr>
-          <p:cNvPr id="19" name="TextBox 18"/>
-          <p:cNvSpPr txBox="1"/>
-          <p:nvPr/>
-        </p:nvSpPr>
-        <p:spPr>
-          <a:xfrm>
-            <a:off x="8046720" y="2240280"/>
-            <a:ext cx="3337560" cy="3657600"/>
+            <a:off x="6553047" y="2606040"/>
+            <a:ext cx="4815687" cy="3337560"/>
           </a:xfrm>
           <a:prstGeom prst="rect">
             <a:avLst/>
@@ -8171,7 +10087,7 @@
           <a:p>
             <a:pPr marL="274320" indent="-274320">
               <a:spcAft>
-                <a:spcPts val="810"/>
+                <a:spcPts val="990"/>
               </a:spcAft>
               <a:buClr>
                 <a:srgbClr val="0645AD"/>
@@ -8180,19 +10096,19 @@
               <a:buChar char="•"/>
             </a:pPr>
             <a:r>
-              <a:rPr sz="1800" b="0">
+              <a:rPr sz="2200" b="0">
                 <a:solidFill>
                   <a:srgbClr val="202122"/>
                 </a:solidFill>
                 <a:latin typeface="Calibri"/>
               </a:rPr>
-              <a:t>Steps are numbered and jargon-free</a:t>
+              <a:t>Crib sheets and smart sheets</a:t>
             </a:r>
           </a:p>
           <a:p>
             <a:pPr marL="274320" indent="-274320">
               <a:spcAft>
-                <a:spcPts val="810"/>
+                <a:spcPts val="990"/>
               </a:spcAft>
               <a:buClr>
                 <a:srgbClr val="0645AD"/>
@@ -8201,19 +10117,19 @@
               <a:buChar char="•"/>
             </a:pPr>
             <a:r>
-              <a:rPr sz="1800" b="0">
+              <a:rPr sz="2200" b="0">
                 <a:solidFill>
                   <a:srgbClr val="202122"/>
                 </a:solidFill>
                 <a:latin typeface="Calibri"/>
               </a:rPr>
-              <a:t>Screenshots or recording match the steps</a:t>
+              <a:t>Webinars and screencasts</a:t>
             </a:r>
           </a:p>
           <a:p>
             <a:pPr marL="274320" indent="-274320">
               <a:spcAft>
-                <a:spcPts val="810"/>
+                <a:spcPts val="990"/>
               </a:spcAft>
               <a:buClr>
                 <a:srgbClr val="0645AD"/>
@@ -8222,13 +10138,55 @@
               <a:buChar char="•"/>
             </a:pPr>
             <a:r>
-              <a:rPr sz="1800" b="0">
+              <a:rPr sz="2200" b="0">
                 <a:solidFill>
                   <a:srgbClr val="202122"/>
                 </a:solidFill>
                 <a:latin typeface="Calibri"/>
               </a:rPr>
-              <a:t>Feedback acted on</a:t>
+              <a:t>VLEs and MLEs</a:t>
+            </a:r>
+          </a:p>
+          <a:p>
+            <a:pPr marL="274320" indent="-274320">
+              <a:spcAft>
+                <a:spcPts val="990"/>
+              </a:spcAft>
+              <a:buClr>
+                <a:srgbClr val="0645AD"/>
+              </a:buClr>
+              <a:buFont typeface="Arial"/>
+              <a:buChar char="•"/>
+            </a:pPr>
+            <a:r>
+              <a:rPr sz="2200" b="0">
+                <a:solidFill>
+                  <a:srgbClr val="202122"/>
+                </a:solidFill>
+                <a:latin typeface="Calibri"/>
+              </a:rPr>
+              <a:t>Sandboxed practice environments</a:t>
+            </a:r>
+          </a:p>
+          <a:p>
+            <a:pPr marL="274320" indent="-274320">
+              <a:spcAft>
+                <a:spcPts val="990"/>
+              </a:spcAft>
+              <a:buClr>
+                <a:srgbClr val="0645AD"/>
+              </a:buClr>
+              <a:buFont typeface="Arial"/>
+              <a:buChar char="•"/>
+            </a:pPr>
+            <a:r>
+              <a:rPr sz="2200" b="0">
+                <a:solidFill>
+                  <a:srgbClr val="202122"/>
+                </a:solidFill>
+                <a:latin typeface="Calibri"/>
+              </a:rPr>
+              <a:t>MOOCs</a:t>
             </a:r>
           </a:p>
         </p:txBody>
@@ -8247,7 +10205,7 @@
     <p:bg>
       <p:bgPr>
         <a:solidFill>
-          <a:srgbClr val="03306E"/>
+          <a:srgbClr val="FFFFFF"/>
         </a:solidFill>
         <a:effectLst/>
       </p:bgPr>
@@ -8283,7 +10241,7 @@
             <a:r>
               <a:rPr sz="1100" b="1" i="0">
                 <a:solidFill>
-                  <a:srgbClr val="A9C8F0"/>
+                  <a:srgbClr val="54595D"/>
                 </a:solidFill>
                 <a:latin typeface="Calibri"/>
               </a:rPr>
@@ -8316,24 +10274,90 @@
             <a:r>
               <a:rPr sz="3200" b="1" i="0">
                 <a:solidFill>
-                  <a:srgbClr val="FFFFFF"/>
+                  <a:srgbClr val="03306E"/>
                 </a:solidFill>
                 <a:latin typeface="Cambria"/>
               </a:rPr>
-              <a:t>Exit ticket</a:t>
-            </a:r>
-          </a:p>
-        </p:txBody>
-      </p:sp>
-      <p:sp>
-        <p:nvSpPr>
-          <p:cNvPr id="4" name="Oval 3"/>
+              <a:t>Quick check: Training users</a:t>
+            </a:r>
+          </a:p>
+        </p:txBody>
+      </p:sp>
+      <p:sp>
+        <p:nvSpPr>
+          <p:cNvPr id="4" name="TextBox 3"/>
+          <p:cNvSpPr txBox="1"/>
+          <p:nvPr/>
+        </p:nvSpPr>
+        <p:spPr>
+          <a:xfrm>
+            <a:off x="548640" y="6446520"/>
+            <a:ext cx="8229600" cy="274320"/>
+          </a:xfrm>
+          <a:prstGeom prst="rect">
+            <a:avLst/>
+          </a:prstGeom>
+          <a:noFill/>
+        </p:spPr>
+        <p:txBody>
+          <a:bodyPr wrap="square" anchor="t" lIns="0" rIns="0" tIns="0" bIns="0"/>
+          <a:lstStyle/>
+          <a:p>
+            <a:pPr algn="l"/>
+            <a:r>
+              <a:rPr sz="1000" b="0" i="0">
+                <a:solidFill>
+                  <a:srgbClr val="54595D"/>
+                </a:solidFill>
+                <a:latin typeface="Calibri"/>
+              </a:rPr>
+              <a:t>Digital Support and Security T Level  ·  Digital Solutions and Training Users</a:t>
+            </a:r>
+          </a:p>
+        </p:txBody>
+      </p:sp>
+      <p:sp>
+        <p:nvSpPr>
+          <p:cNvPr id="5" name="TextBox 4"/>
+          <p:cNvSpPr txBox="1"/>
+          <p:nvPr/>
+        </p:nvSpPr>
+        <p:spPr>
+          <a:xfrm>
+            <a:off x="10728655" y="6446520"/>
+            <a:ext cx="914400" cy="274320"/>
+          </a:xfrm>
+          <a:prstGeom prst="rect">
+            <a:avLst/>
+          </a:prstGeom>
+          <a:noFill/>
+        </p:spPr>
+        <p:txBody>
+          <a:bodyPr wrap="square" anchor="t" lIns="0" rIns="0" tIns="0" bIns="0"/>
+          <a:lstStyle/>
+          <a:p>
+            <a:pPr algn="r"/>
+            <a:r>
+              <a:rPr sz="1000" b="0" i="0">
+                <a:solidFill>
+                  <a:srgbClr val="54595D"/>
+                </a:solidFill>
+                <a:latin typeface="Calibri"/>
+              </a:rPr>
+              <a:t>9</a:t>
+            </a:r>
+          </a:p>
+        </p:txBody>
+      </p:sp>
+      <p:sp>
+        <p:nvSpPr>
+          <p:cNvPr id="6" name="Oval 5"/>
           <p:cNvSpPr/>
           <p:nvPr/>
         </p:nvSpPr>
         <p:spPr>
           <a:xfrm>
-            <a:off x="548640" y="1737360"/>
+            <a:off x="548640" y="1691640"/>
             <a:ext cx="502920" cy="502920"/>
           </a:xfrm>
           <a:prstGeom prst="ellipse">
@@ -8367,7 +10391,7 @@
           <a:p>
             <a:pPr algn="ctr"/>
             <a:r>
-              <a:rPr sz="1700" b="1">
+              <a:rPr sz="1600" b="1">
                 <a:solidFill>
                   <a:srgbClr val="202122"/>
                 </a:solidFill>
@@ -8380,14 +10404,14 @@
       </p:sp>
       <p:sp>
         <p:nvSpPr>
-          <p:cNvPr id="5" name="TextBox 4"/>
+          <p:cNvPr id="7" name="TextBox 6"/>
           <p:cNvSpPr txBox="1"/>
           <p:nvPr/>
         </p:nvSpPr>
         <p:spPr>
           <a:xfrm>
-            <a:off x="1325880" y="1645920"/>
-            <a:ext cx="6583680" cy="822960"/>
+            <a:off x="1371600" y="1645920"/>
+            <a:ext cx="10271455" cy="1188720"/>
           </a:xfrm>
           <a:prstGeom prst="rect">
             <a:avLst/>
@@ -8395,31 +10419,31 @@
           <a:noFill/>
         </p:spPr>
         <p:txBody>
-          <a:bodyPr wrap="square" anchor="ctr" lIns="0" rIns="0" tIns="0" bIns="0"/>
+          <a:bodyPr wrap="square" anchor="t" lIns="0" rIns="0" tIns="0" bIns="0"/>
           <a:lstStyle/>
           <a:p>
             <a:pPr algn="l"/>
             <a:r>
-              <a:rPr sz="2000" b="0" i="0">
-                <a:solidFill>
-                  <a:srgbClr val="FFFFFF"/>
-                </a:solidFill>
-                <a:latin typeface="Calibri"/>
-              </a:rPr>
-              <a:t>Which training method suits a busy manager?</a:t>
-            </a:r>
-          </a:p>
-        </p:txBody>
-      </p:sp>
-      <p:sp>
-        <p:nvSpPr>
-          <p:cNvPr id="6" name="Oval 5"/>
+              <a:rPr sz="2400" b="0" i="0">
+                <a:solidFill>
+                  <a:srgbClr val="202122"/>
+                </a:solidFill>
+                <a:latin typeface="Calibri"/>
+              </a:rPr>
+              <a:t>What is a sandboxed environment for?</a:t>
+            </a:r>
+          </a:p>
+        </p:txBody>
+      </p:sp>
+      <p:sp>
+        <p:nvSpPr>
+          <p:cNvPr id="8" name="Oval 7"/>
           <p:cNvSpPr/>
           <p:nvPr/>
         </p:nvSpPr>
         <p:spPr>
           <a:xfrm>
-            <a:off x="548640" y="2697480"/>
+            <a:off x="548640" y="3108960"/>
             <a:ext cx="502920" cy="502920"/>
           </a:xfrm>
           <a:prstGeom prst="ellipse">
@@ -8453,7 +10477,7 @@
           <a:p>
             <a:pPr algn="ctr"/>
             <a:r>
-              <a:rPr sz="1700" b="1">
+              <a:rPr sz="1600" b="1">
                 <a:solidFill>
                   <a:srgbClr val="202122"/>
                 </a:solidFill>
@@ -8466,14 +10490,14 @@
       </p:sp>
       <p:sp>
         <p:nvSpPr>
-          <p:cNvPr id="7" name="TextBox 6"/>
+          <p:cNvPr id="9" name="TextBox 8"/>
           <p:cNvSpPr txBox="1"/>
           <p:nvPr/>
         </p:nvSpPr>
         <p:spPr>
           <a:xfrm>
-            <a:off x="1325880" y="2606040"/>
-            <a:ext cx="6583680" cy="822960"/>
+            <a:off x="1371600" y="3063240"/>
+            <a:ext cx="10271455" cy="1188720"/>
           </a:xfrm>
           <a:prstGeom prst="rect">
             <a:avLst/>
@@ -8481,31 +10505,31 @@
           <a:noFill/>
         </p:spPr>
         <p:txBody>
-          <a:bodyPr wrap="square" anchor="ctr" lIns="0" rIns="0" tIns="0" bIns="0"/>
+          <a:bodyPr wrap="square" anchor="t" lIns="0" rIns="0" tIns="0" bIns="0"/>
           <a:lstStyle/>
           <a:p>
             <a:pPr algn="l"/>
             <a:r>
-              <a:rPr sz="2000" b="0" i="0">
-                <a:solidFill>
-                  <a:srgbClr val="FFFFFF"/>
-                </a:solidFill>
-                <a:latin typeface="Calibri"/>
-              </a:rPr>
-              <a:t>Why does CPD matter for support staff?</a:t>
-            </a:r>
-          </a:p>
-        </p:txBody>
-      </p:sp>
-      <p:sp>
-        <p:nvSpPr>
-          <p:cNvPr id="8" name="Oval 7"/>
+              <a:rPr sz="2400" b="0" i="0">
+                <a:solidFill>
+                  <a:srgbClr val="202122"/>
+                </a:solidFill>
+                <a:latin typeface="Calibri"/>
+              </a:rPr>
+              <a:t>What is a crib sheet?</a:t>
+            </a:r>
+          </a:p>
+        </p:txBody>
+      </p:sp>
+      <p:sp>
+        <p:nvSpPr>
+          <p:cNvPr id="10" name="Oval 9"/>
           <p:cNvSpPr/>
           <p:nvPr/>
         </p:nvSpPr>
         <p:spPr>
           <a:xfrm>
-            <a:off x="548640" y="3657600"/>
+            <a:off x="548640" y="4526280"/>
             <a:ext cx="502920" cy="502920"/>
           </a:xfrm>
           <a:prstGeom prst="ellipse">
@@ -8539,7 +10563,7 @@
           <a:p>
             <a:pPr algn="ctr"/>
             <a:r>
-              <a:rPr sz="1700" b="1">
+              <a:rPr sz="1600" b="1">
                 <a:solidFill>
                   <a:srgbClr val="202122"/>
                 </a:solidFill>
@@ -8548,83 +10572,6 @@
               <a:t>3</a:t>
             </a:r>
           </a:p>
-        </p:txBody>
-      </p:sp>
-      <p:sp>
-        <p:nvSpPr>
-          <p:cNvPr id="9" name="TextBox 8"/>
-          <p:cNvSpPr txBox="1"/>
-          <p:nvPr/>
-        </p:nvSpPr>
-        <p:spPr>
-          <a:xfrm>
-            <a:off x="1325880" y="3566160"/>
-            <a:ext cx="6583680" cy="822960"/>
-          </a:xfrm>
-          <a:prstGeom prst="rect">
-            <a:avLst/>
-          </a:prstGeom>
-          <a:noFill/>
-        </p:spPr>
-        <p:txBody>
-          <a:bodyPr wrap="square" anchor="ctr" lIns="0" rIns="0" tIns="0" bIns="0"/>
-          <a:lstStyle/>
-          <a:p>
-            <a:pPr algn="l"/>
-            <a:r>
-              <a:rPr sz="2000" b="0" i="0">
-                <a:solidFill>
-                  <a:srgbClr val="FFFFFF"/>
-                </a:solidFill>
-                <a:latin typeface="Calibri"/>
-              </a:rPr>
-              <a:t>How would you explain the benefit of a CRM to a sales team?</a:t>
-            </a:r>
-          </a:p>
-        </p:txBody>
-      </p:sp>
-      <p:sp>
-        <p:nvSpPr>
-          <p:cNvPr id="10" name="Rounded Rectangle 9"/>
-          <p:cNvSpPr/>
-          <p:nvPr/>
-        </p:nvSpPr>
-        <p:spPr>
-          <a:xfrm>
-            <a:off x="8229600" y="1645920"/>
-            <a:ext cx="3410712" cy="2926080"/>
-          </a:xfrm>
-          <a:prstGeom prst="roundRect">
-            <a:avLst>
-              <a:gd name="adj" fmla="val 8000"/>
-            </a:avLst>
-          </a:prstGeom>
-          <a:solidFill>
-            <a:srgbClr val="0645AD"/>
-          </a:solidFill>
-          <a:ln>
-            <a:noFill/>
-          </a:ln>
-          <a:effectLst/>
-        </p:spPr>
-        <p:style>
-          <a:lnRef idx="1">
-            <a:schemeClr val="accent1"/>
-          </a:lnRef>
-          <a:fillRef idx="3">
-            <a:schemeClr val="accent1"/>
-          </a:fillRef>
-          <a:effectRef idx="2">
-            <a:schemeClr val="accent1"/>
-          </a:effectRef>
-          <a:fontRef idx="minor">
-            <a:schemeClr val="lt1"/>
-          </a:fontRef>
-        </p:style>
-        <p:txBody>
-          <a:bodyPr rtlCol="0" anchor="ctr"/>
-          <a:lstStyle/>
-          <a:p/>
         </p:txBody>
       </p:sp>
       <p:sp>
@@ -8635,8 +10582,8 @@
         </p:nvSpPr>
         <p:spPr>
           <a:xfrm>
-            <a:off x="8503920" y="1874519"/>
-            <a:ext cx="2926080" cy="365760"/>
+            <a:off x="1371600" y="4480560"/>
+            <a:ext cx="10271455" cy="1188720"/>
           </a:xfrm>
           <a:prstGeom prst="rect">
             <a:avLst/>
@@ -8649,13 +10596,13 @@
           <a:p>
             <a:pPr algn="l"/>
             <a:r>
-              <a:rPr sz="1300" b="1" i="0">
-                <a:solidFill>
-                  <a:srgbClr val="A9C8F0"/>
-                </a:solidFill>
-                <a:latin typeface="Calibri"/>
-              </a:rPr>
-              <a:t>REVISE THIS TOPIC</a:t>
+              <a:rPr sz="2400" b="0" i="0">
+                <a:solidFill>
+                  <a:srgbClr val="202122"/>
+                </a:solidFill>
+                <a:latin typeface="Calibri"/>
+              </a:rPr>
+              <a:t>Why might a screencast suit a large rollout?</a:t>
             </a:r>
           </a:p>
         </p:txBody>
@@ -8668,8 +10615,8 @@
         </p:nvSpPr>
         <p:spPr>
           <a:xfrm>
-            <a:off x="8503920" y="2286000"/>
-            <a:ext cx="2926080" cy="548640"/>
+            <a:off x="548640" y="5852160"/>
+            <a:ext cx="11094415" cy="365760"/>
           </a:xfrm>
           <a:prstGeom prst="rect">
             <a:avLst/>
@@ -8682,79 +10629,13 @@
           <a:p>
             <a:pPr algn="l"/>
             <a:r>
-              <a:rPr sz="1400" b="0" i="0">
-                <a:solidFill>
-                  <a:srgbClr val="FFFFFF"/>
-                </a:solidFill>
-                <a:latin typeface="Calibri"/>
-              </a:rPr>
-              <a:t>Revision notes for this lesson are on the study wiki:</a:t>
-            </a:r>
-          </a:p>
-        </p:txBody>
-      </p:sp>
-      <p:sp>
-        <p:nvSpPr>
-          <p:cNvPr id="13" name="TextBox 12"/>
-          <p:cNvSpPr txBox="1"/>
-          <p:nvPr/>
-        </p:nvSpPr>
-        <p:spPr>
-          <a:xfrm>
-            <a:off x="8503920" y="2926080"/>
-            <a:ext cx="2926080" cy="1463040"/>
-          </a:xfrm>
-          <a:prstGeom prst="rect">
-            <a:avLst/>
-          </a:prstGeom>
-          <a:noFill/>
-        </p:spPr>
-        <p:txBody>
-          <a:bodyPr wrap="square" anchor="t" lIns="0" rIns="0" tIns="0" bIns="0"/>
-          <a:lstStyle/>
-          <a:p>
-            <a:pPr algn="l"/>
-            <a:r>
-              <a:rPr sz="1900" b="1" i="0">
-                <a:solidFill>
-                  <a:srgbClr val="FFFFFF"/>
-                </a:solidFill>
-                <a:latin typeface="Cambria"/>
-              </a:rPr>
-              <a:t>Digital Support - Installing, Configuring and Supporting Software and Operating Systems</a:t>
-            </a:r>
-          </a:p>
-        </p:txBody>
-      </p:sp>
-      <p:sp>
-        <p:nvSpPr>
-          <p:cNvPr id="14" name="TextBox 13"/>
-          <p:cNvSpPr txBox="1"/>
-          <p:nvPr/>
-        </p:nvSpPr>
-        <p:spPr>
-          <a:xfrm>
-            <a:off x="548640" y="5669280"/>
-            <a:ext cx="11094415" cy="548640"/>
-          </a:xfrm>
-          <a:prstGeom prst="rect">
-            <a:avLst/>
-          </a:prstGeom>
-          <a:noFill/>
-        </p:spPr>
-        <p:txBody>
-          <a:bodyPr wrap="square" anchor="t" lIns="0" rIns="0" tIns="0" bIns="0"/>
-          <a:lstStyle/>
-          <a:p>
-            <a:pPr algn="l"/>
-            <a:r>
-              <a:rPr sz="1200" b="0" i="0">
-                <a:solidFill>
-                  <a:srgbClr val="A9C8F0"/>
-                </a:solidFill>
-                <a:latin typeface="Calibri"/>
-              </a:rPr>
-              <a:t>https://lana6478.github.io/Digital-Suport-and-security-T-levle/#/02-occupational-specialisms/digital-support/02-software-and-os-support.md</a:t>
+              <a:rPr sz="1300" b="0" i="1">
+                <a:solidFill>
+                  <a:srgbClr val="54595D"/>
+                </a:solidFill>
+                <a:latin typeface="Calibri"/>
+              </a:rPr>
+              <a:t>Answer on mini whiteboards or in your book. Answers are in the speaker notes.</a:t>
             </a:r>
           </a:p>
         </p:txBody>
